--- a/python-course-ppt/逐节课件/Python讲授课件-单元10.pptx
+++ b/python-course-ppt/逐节课件/Python讲授课件-单元10.pptx
@@ -335,6 +335,86 @@
           </a:p>
         </p:txBody>
       </p:sp>
+      <p:sp>
+        <p:nvSpPr>
+          <p:cNvPr id="2" name="讲课提示"/>
+          <p:cNvSpPr txBox="1"/>
+          <p:nvPr/>
+        </p:nvSpPr>
+        <p:spPr>
+          <a:xfrm>
+            <a:off x="457200" y="457200"/>
+            <a:ext cx="6858000" cy="4800600"/>
+          </a:xfrm>
+          <a:prstGeom prst="rect">
+            <a:avLst/>
+          </a:prstGeom>
+        </p:spPr>
+        <p:txBody>
+          <a:bodyPr wrap="square"/>
+          <a:lstStyle/>
+          <a:p>
+            <a:r>
+              <a:rPr lang="zh-CN" dirty="0"/>
+              <a:t>单元 10 · 单元 10 · 测试代码</a:t>
+            </a:r>
+          </a:p>
+          <a:p>
+            <a:r>
+              <a:rPr lang="zh-CN" dirty="0"/>
+              <a:t/>
+            </a:r>
+          </a:p>
+          <a:p>
+            <a:r>
+              <a:rPr lang="zh-CN" dirty="0"/>
+              <a:t>本单元包含以下课节：</a:t>
+            </a:r>
+          </a:p>
+          <a:p>
+            <a:r>
+              <a:rPr lang="zh-CN" dirty="0"/>
+              <a:t>· 第 52 节 为什么需要测试与三条命名规则</a:t>
+            </a:r>
+          </a:p>
+          <a:p>
+            <a:r>
+              <a:rPr lang="zh-CN" dirty="0"/>
+              <a:t>· 第 53 节 assert 与测试用例设计</a:t>
+            </a:r>
+          </a:p>
+          <a:p>
+            <a:r>
+              <a:rPr lang="zh-CN" dirty="0"/>
+              <a:t>· 第 54 节 parametrize、测试类与运行命令</a:t>
+            </a:r>
+          </a:p>
+          <a:p>
+            <a:r>
+              <a:rPr lang="zh-CN" dirty="0"/>
+              <a:t>· 第 55 节 测试夹具与示例串讲</a:t>
+            </a:r>
+          </a:p>
+          <a:p>
+            <a:r>
+              <a:rPr lang="zh-CN" dirty="0"/>
+              <a:t>· 第 56 节 动手实战、答案与验收</a:t>
+            </a:r>
+          </a:p>
+          <a:p>
+            <a:r>
+              <a:rPr lang="zh-CN" dirty="0"/>
+              <a:t/>
+            </a:r>
+          </a:p>
+          <a:p>
+            <a:r>
+              <a:rPr lang="zh-CN" dirty="0"/>
+              <a:t>开场用 3 分钟讲清：这个单元学完能做出什么，最后会被关卡怎么验。</a:t>
+            </a:r>
+          </a:p>
+        </p:txBody>
+      </p:sp>
     </p:spTree>
   </p:cSld>
   <p:clrMapOvr>
@@ -470,6 +550,116 @@
           </a:p>
         </p:txBody>
       </p:sp>
+      <p:sp>
+        <p:nvSpPr>
+          <p:cNvPr id="2" name="讲课提示"/>
+          <p:cNvSpPr txBox="1"/>
+          <p:nvPr/>
+        </p:nvSpPr>
+        <p:spPr>
+          <a:xfrm>
+            <a:off x="457200" y="457200"/>
+            <a:ext cx="6858000" cy="4800600"/>
+          </a:xfrm>
+          <a:prstGeom prst="rect">
+            <a:avLst/>
+          </a:prstGeom>
+        </p:spPr>
+        <p:txBody>
+          <a:bodyPr wrap="square"/>
+          <a:lstStyle/>
+          <a:p>
+            <a:r>
+              <a:rPr lang="zh-CN" dirty="0"/>
+              <a:t>第 56 节 · 动手实战、答案与验收</a:t>
+            </a:r>
+          </a:p>
+          <a:p>
+            <a:r>
+              <a:rPr lang="zh-CN" dirty="0"/>
+              <a:t>单元 10 · 测试代码 · W12</a:t>
+            </a:r>
+          </a:p>
+          <a:p>
+            <a:r>
+              <a:rPr lang="zh-CN" dirty="0"/>
+              <a:t/>
+            </a:r>
+          </a:p>
+          <a:p>
+            <a:r>
+              <a:rPr lang="zh-CN" dirty="0"/>
+              <a:t>学习目标：独立完成单元 10 练习，能为函数写出完整测试套件</a:t>
+            </a:r>
+          </a:p>
+          <a:p>
+            <a:r>
+              <a:rPr lang="zh-CN" dirty="0"/>
+              <a:t/>
+            </a:r>
+          </a:p>
+          <a:p>
+            <a:r>
+              <a:rPr lang="zh-CN" dirty="0"/>
+              <a:t>课堂实操（40 分钟，不看答案）：</a:t>
+            </a:r>
+          </a:p>
+          <a:p>
+            <a:r>
+              <a:rPr lang="zh-CN" dirty="0"/>
+              <a:t>· ★ 动手项目 11.1–11.3 投票分析器测试</a:t>
+            </a:r>
+          </a:p>
+          <a:p>
+            <a:r>
+              <a:rPr lang="zh-CN" dirty="0"/>
+              <a:t>· 限时 30 分钟独立完成基础档</a:t>
+            </a:r>
+          </a:p>
+          <a:p>
+            <a:r>
+              <a:rPr lang="zh-CN" dirty="0"/>
+              <a:t>· 逐题对照答案并打勾验收自测</a:t>
+            </a:r>
+          </a:p>
+          <a:p>
+            <a:r>
+              <a:rPr lang="zh-CN" dirty="0"/>
+              <a:t/>
+            </a:r>
+          </a:p>
+          <a:p>
+            <a:r>
+              <a:rPr lang="zh-CN" dirty="0"/>
+              <a:t>课后作业：</a:t>
+            </a:r>
+          </a:p>
+          <a:p>
+            <a:r>
+              <a:rPr lang="zh-CN" dirty="0"/>
+              <a:t>· 产出：pytest 套件 ≥10 条</a:t>
+            </a:r>
+          </a:p>
+          <a:p>
+            <a:r>
+              <a:rPr lang="zh-CN" dirty="0"/>
+              <a:t>· 完成本单元小结与产出检查</a:t>
+            </a:r>
+          </a:p>
+          <a:p>
+            <a:r>
+              <a:rPr lang="zh-CN" dirty="0"/>
+              <a:t/>
+            </a:r>
+          </a:p>
+          <a:p>
+            <a:r>
+              <a:rPr lang="zh-CN" dirty="0"/>
+              <a:t>节奏：讲 20 分钟 → 学员自己敲 40 分钟（不看答案）→ 对讲评自查 20 分钟 → 写作业 10 分钟。</a:t>
+            </a:r>
+          </a:p>
+        </p:txBody>
+      </p:sp>
     </p:spTree>
   </p:cSld>
   <p:clrMapOvr>
@@ -563,6 +753,74 @@
           </a:p>
         </p:txBody>
       </p:sp>
+      <p:sp>
+        <p:nvSpPr>
+          <p:cNvPr id="2" name="讲课提示"/>
+          <p:cNvSpPr txBox="1"/>
+          <p:nvPr/>
+        </p:nvSpPr>
+        <p:spPr>
+          <a:xfrm>
+            <a:off x="457200" y="457200"/>
+            <a:ext cx="6858000" cy="4800600"/>
+          </a:xfrm>
+          <a:prstGeom prst="rect">
+            <a:avLst/>
+          </a:prstGeom>
+        </p:spPr>
+        <p:txBody>
+          <a:bodyPr wrap="square"/>
+          <a:lstStyle/>
+          <a:p>
+            <a:r>
+              <a:rPr lang="zh-CN" dirty="0"/>
+              <a:t>第 56 节 · 核心知识点：动手实战、答案与验收</a:t>
+            </a:r>
+          </a:p>
+          <a:p>
+            <a:r>
+              <a:rPr lang="zh-CN" dirty="0"/>
+              <a:t/>
+            </a:r>
+          </a:p>
+          <a:p>
+            <a:r>
+              <a:rPr lang="zh-CN" dirty="0"/>
+              <a:t>讲这一页时：先让学生说出上节课的结论，再逐块讲要点。</a:t>
+            </a:r>
+          </a:p>
+          <a:p>
+            <a:r>
+              <a:rPr lang="zh-CN" dirty="0"/>
+              <a:t>每讲完一块，问一句「这一步如果写错了，报错会长什么样？」——把错误提前讲。</a:t>
+            </a:r>
+          </a:p>
+          <a:p>
+            <a:r>
+              <a:rPr lang="zh-CN" dirty="0"/>
+              <a:t/>
+            </a:r>
+          </a:p>
+          <a:p>
+            <a:r>
+              <a:rPr lang="zh-CN" dirty="0"/>
+              <a:t>本节目标：独立完成单元 10 练习，能为函数写出完整测试套件</a:t>
+            </a:r>
+          </a:p>
+          <a:p>
+            <a:r>
+              <a:rPr lang="zh-CN" dirty="0"/>
+              <a:t/>
+            </a:r>
+          </a:p>
+          <a:p>
+            <a:r>
+              <a:rPr lang="zh-CN" dirty="0"/>
+              <a:t>看不到懂的地方，回讲义对应小节读一遍，再回来对着这页复述一次——能讲出来才算真懂。</a:t>
+            </a:r>
+          </a:p>
+        </p:txBody>
+      </p:sp>
     </p:spTree>
   </p:cSld>
   <p:clrMapOvr>
@@ -632,6 +890,50 @@
           </a:p>
         </p:txBody>
       </p:sp>
+      <p:sp>
+        <p:nvSpPr>
+          <p:cNvPr id="2" name="讲课提示"/>
+          <p:cNvSpPr txBox="1"/>
+          <p:nvPr/>
+        </p:nvSpPr>
+        <p:spPr>
+          <a:xfrm>
+            <a:off x="457200" y="457200"/>
+            <a:ext cx="6858000" cy="4800600"/>
+          </a:xfrm>
+          <a:prstGeom prst="rect">
+            <a:avLst/>
+          </a:prstGeom>
+        </p:spPr>
+        <p:txBody>
+          <a:bodyPr wrap="square"/>
+          <a:lstStyle/>
+          <a:p>
+            <a:r>
+              <a:rPr lang="zh-CN" dirty="0"/>
+              <a:t>单元 10 小结 · 单元 10 · 小结</a:t>
+            </a:r>
+          </a:p>
+          <a:p>
+            <a:r>
+              <a:rPr lang="zh-CN" dirty="0"/>
+              <a:t/>
+            </a:r>
+          </a:p>
+          <a:p>
+            <a:r>
+              <a:rPr lang="zh-CN" dirty="0"/>
+              <a:t>收尾动作：让学生合上讲义，口述本单元三个最重要的结论；说不出来的，回对应课节。</a:t>
+            </a:r>
+          </a:p>
+          <a:p>
+            <a:r>
+              <a:rPr lang="zh-CN" dirty="0"/>
+              <a:t>然后当场勾一遍本单元课节的「已完成」，没打勾的进下一单元前补掉。</a:t>
+            </a:r>
+          </a:p>
+        </p:txBody>
+      </p:sp>
     </p:spTree>
   </p:cSld>
   <p:clrMapOvr>
@@ -755,6 +1057,104 @@
           </a:p>
         </p:txBody>
       </p:sp>
+      <p:sp>
+        <p:nvSpPr>
+          <p:cNvPr id="2" name="讲课提示"/>
+          <p:cNvSpPr txBox="1"/>
+          <p:nvPr/>
+        </p:nvSpPr>
+        <p:spPr>
+          <a:xfrm>
+            <a:off x="457200" y="457200"/>
+            <a:ext cx="6858000" cy="4800600"/>
+          </a:xfrm>
+          <a:prstGeom prst="rect">
+            <a:avLst/>
+          </a:prstGeom>
+        </p:spPr>
+        <p:txBody>
+          <a:bodyPr wrap="square"/>
+          <a:lstStyle/>
+          <a:p>
+            <a:r>
+              <a:rPr lang="zh-CN" dirty="0"/>
+              <a:t>第 52 节 · 为什么需要测试与三条命名规则</a:t>
+            </a:r>
+          </a:p>
+          <a:p>
+            <a:r>
+              <a:rPr lang="zh-CN" dirty="0"/>
+              <a:t>单元 10 · 测试代码 · W12</a:t>
+            </a:r>
+          </a:p>
+          <a:p>
+            <a:r>
+              <a:rPr lang="zh-CN" dirty="0"/>
+              <a:t/>
+            </a:r>
+          </a:p>
+          <a:p>
+            <a:r>
+              <a:rPr lang="zh-CN" dirty="0"/>
+              <a:t>学习目标：理解 Bug 分两种，自动化测试的价值在改代码之前</a:t>
+            </a:r>
+          </a:p>
+          <a:p>
+            <a:r>
+              <a:rPr lang="zh-CN" dirty="0"/>
+              <a:t/>
+            </a:r>
+          </a:p>
+          <a:p>
+            <a:r>
+              <a:rPr lang="zh-CN" dirty="0"/>
+              <a:t>课堂实操（40 分钟，不看答案）：</a:t>
+            </a:r>
+          </a:p>
+          <a:p>
+            <a:r>
+              <a:rPr lang="zh-CN" dirty="0"/>
+              <a:t>· 先故意写一个错函数，看没有测试时能撑多久</a:t>
+            </a:r>
+          </a:p>
+          <a:p>
+            <a:r>
+              <a:rPr lang="zh-CN" dirty="0"/>
+              <a:t>· 把测试函数改成不符合命名规则，看能不能被收集</a:t>
+            </a:r>
+          </a:p>
+          <a:p>
+            <a:r>
+              <a:rPr lang="zh-CN" dirty="0"/>
+              <a:t/>
+            </a:r>
+          </a:p>
+          <a:p>
+            <a:r>
+              <a:rPr lang="zh-CN" dirty="0"/>
+              <a:t>课后作业：</a:t>
+            </a:r>
+          </a:p>
+          <a:p>
+            <a:r>
+              <a:rPr lang="zh-CN" dirty="0"/>
+              <a:t>· 完成动手练习 10-1 ~ 10-2</a:t>
+            </a:r>
+          </a:p>
+          <a:p>
+            <a:r>
+              <a:rPr lang="zh-CN" dirty="0"/>
+              <a:t/>
+            </a:r>
+          </a:p>
+          <a:p>
+            <a:r>
+              <a:rPr lang="zh-CN" dirty="0"/>
+              <a:t>节奏：讲 20 分钟 → 学员自己敲 40 分钟（不看答案）→ 对讲评自查 20 分钟 → 写作业 10 分钟。</a:t>
+            </a:r>
+          </a:p>
+        </p:txBody>
+      </p:sp>
     </p:spTree>
   </p:cSld>
   <p:clrMapOvr>
@@ -848,6 +1248,74 @@
           </a:p>
         </p:txBody>
       </p:sp>
+      <p:sp>
+        <p:nvSpPr>
+          <p:cNvPr id="2" name="讲课提示"/>
+          <p:cNvSpPr txBox="1"/>
+          <p:nvPr/>
+        </p:nvSpPr>
+        <p:spPr>
+          <a:xfrm>
+            <a:off x="457200" y="457200"/>
+            <a:ext cx="6858000" cy="4800600"/>
+          </a:xfrm>
+          <a:prstGeom prst="rect">
+            <a:avLst/>
+          </a:prstGeom>
+        </p:spPr>
+        <p:txBody>
+          <a:bodyPr wrap="square"/>
+          <a:lstStyle/>
+          <a:p>
+            <a:r>
+              <a:rPr lang="zh-CN" dirty="0"/>
+              <a:t>第 52 节 · 核心知识点：为什么需要测试与三条命名规则</a:t>
+            </a:r>
+          </a:p>
+          <a:p>
+            <a:r>
+              <a:rPr lang="zh-CN" dirty="0"/>
+              <a:t/>
+            </a:r>
+          </a:p>
+          <a:p>
+            <a:r>
+              <a:rPr lang="zh-CN" dirty="0"/>
+              <a:t>讲这一页时：先让学生说出上节课的结论，再逐块讲要点。</a:t>
+            </a:r>
+          </a:p>
+          <a:p>
+            <a:r>
+              <a:rPr lang="zh-CN" dirty="0"/>
+              <a:t>每讲完一块，问一句「这一步如果写错了，报错会长什么样？」——把错误提前讲。</a:t>
+            </a:r>
+          </a:p>
+          <a:p>
+            <a:r>
+              <a:rPr lang="zh-CN" dirty="0"/>
+              <a:t/>
+            </a:r>
+          </a:p>
+          <a:p>
+            <a:r>
+              <a:rPr lang="zh-CN" dirty="0"/>
+              <a:t>本节目标：理解 Bug 分两种，自动化测试的价值在改代码之前</a:t>
+            </a:r>
+          </a:p>
+          <a:p>
+            <a:r>
+              <a:rPr lang="zh-CN" dirty="0"/>
+              <a:t/>
+            </a:r>
+          </a:p>
+          <a:p>
+            <a:r>
+              <a:rPr lang="zh-CN" dirty="0"/>
+              <a:t>看不到懂的地方，回讲义对应小节读一遍，再回来对着这页复述一次——能讲出来才算真懂。</a:t>
+            </a:r>
+          </a:p>
+        </p:txBody>
+      </p:sp>
     </p:spTree>
   </p:cSld>
   <p:clrMapOvr>
@@ -971,6 +1439,104 @@
           </a:p>
         </p:txBody>
       </p:sp>
+      <p:sp>
+        <p:nvSpPr>
+          <p:cNvPr id="2" name="讲课提示"/>
+          <p:cNvSpPr txBox="1"/>
+          <p:nvPr/>
+        </p:nvSpPr>
+        <p:spPr>
+          <a:xfrm>
+            <a:off x="457200" y="457200"/>
+            <a:ext cx="6858000" cy="4800600"/>
+          </a:xfrm>
+          <a:prstGeom prst="rect">
+            <a:avLst/>
+          </a:prstGeom>
+        </p:spPr>
+        <p:txBody>
+          <a:bodyPr wrap="square"/>
+          <a:lstStyle/>
+          <a:p>
+            <a:r>
+              <a:rPr lang="zh-CN" dirty="0"/>
+              <a:t>第 53 节 · assert 与测试用例设计</a:t>
+            </a:r>
+          </a:p>
+          <a:p>
+            <a:r>
+              <a:rPr lang="zh-CN" dirty="0"/>
+              <a:t>单元 10 · 测试代码 · W12</a:t>
+            </a:r>
+          </a:p>
+          <a:p>
+            <a:r>
+              <a:rPr lang="zh-CN" dirty="0"/>
+              <a:t/>
+            </a:r>
+          </a:p>
+          <a:p>
+            <a:r>
+              <a:rPr lang="zh-CN" dirty="0"/>
+              <a:t>学习目标：会用 assert 描述「应该是什么」，掌握正常 + 边界两种用例</a:t>
+            </a:r>
+          </a:p>
+          <a:p>
+            <a:r>
+              <a:rPr lang="zh-CN" dirty="0"/>
+              <a:t/>
+            </a:r>
+          </a:p>
+          <a:p>
+            <a:r>
+              <a:rPr lang="zh-CN" dirty="0"/>
+              <a:t>课堂实操（40 分钟，不看答案）：</a:t>
+            </a:r>
+          </a:p>
+          <a:p>
+            <a:r>
+              <a:rPr lang="zh-CN" dirty="0"/>
+              <a:t>· 给一个函数写 3 条测试：正常 / 边界 / 异常</a:t>
+            </a:r>
+          </a:p>
+          <a:p>
+            <a:r>
+              <a:rPr lang="zh-CN" dirty="0"/>
+              <a:t>· 故意让一条测试失败并读懂报告</a:t>
+            </a:r>
+          </a:p>
+          <a:p>
+            <a:r>
+              <a:rPr lang="zh-CN" dirty="0"/>
+              <a:t/>
+            </a:r>
+          </a:p>
+          <a:p>
+            <a:r>
+              <a:rPr lang="zh-CN" dirty="0"/>
+              <a:t>课后作业：</a:t>
+            </a:r>
+          </a:p>
+          <a:p>
+            <a:r>
+              <a:rPr lang="zh-CN" dirty="0"/>
+              <a:t>· 完成动手练习 10-3 ~ 10-5</a:t>
+            </a:r>
+          </a:p>
+          <a:p>
+            <a:r>
+              <a:rPr lang="zh-CN" dirty="0"/>
+              <a:t/>
+            </a:r>
+          </a:p>
+          <a:p>
+            <a:r>
+              <a:rPr lang="zh-CN" dirty="0"/>
+              <a:t>节奏：讲 20 分钟 → 学员自己敲 40 分钟（不看答案）→ 对讲评自查 20 分钟 → 写作业 10 分钟。</a:t>
+            </a:r>
+          </a:p>
+        </p:txBody>
+      </p:sp>
     </p:spTree>
   </p:cSld>
   <p:clrMapOvr>
@@ -1064,6 +1630,74 @@
           </a:p>
         </p:txBody>
       </p:sp>
+      <p:sp>
+        <p:nvSpPr>
+          <p:cNvPr id="2" name="讲课提示"/>
+          <p:cNvSpPr txBox="1"/>
+          <p:nvPr/>
+        </p:nvSpPr>
+        <p:spPr>
+          <a:xfrm>
+            <a:off x="457200" y="457200"/>
+            <a:ext cx="6858000" cy="4800600"/>
+          </a:xfrm>
+          <a:prstGeom prst="rect">
+            <a:avLst/>
+          </a:prstGeom>
+        </p:spPr>
+        <p:txBody>
+          <a:bodyPr wrap="square"/>
+          <a:lstStyle/>
+          <a:p>
+            <a:r>
+              <a:rPr lang="zh-CN" dirty="0"/>
+              <a:t>第 53 节 · 核心知识点：assert 与测试用例设计</a:t>
+            </a:r>
+          </a:p>
+          <a:p>
+            <a:r>
+              <a:rPr lang="zh-CN" dirty="0"/>
+              <a:t/>
+            </a:r>
+          </a:p>
+          <a:p>
+            <a:r>
+              <a:rPr lang="zh-CN" dirty="0"/>
+              <a:t>讲这一页时：先让学生说出上节课的结论，再逐块讲要点。</a:t>
+            </a:r>
+          </a:p>
+          <a:p>
+            <a:r>
+              <a:rPr lang="zh-CN" dirty="0"/>
+              <a:t>每讲完一块，问一句「这一步如果写错了，报错会长什么样？」——把错误提前讲。</a:t>
+            </a:r>
+          </a:p>
+          <a:p>
+            <a:r>
+              <a:rPr lang="zh-CN" dirty="0"/>
+              <a:t/>
+            </a:r>
+          </a:p>
+          <a:p>
+            <a:r>
+              <a:rPr lang="zh-CN" dirty="0"/>
+              <a:t>本节目标：会用 assert 描述「应该是什么」，掌握正常 + 边界两种用例</a:t>
+            </a:r>
+          </a:p>
+          <a:p>
+            <a:r>
+              <a:rPr lang="zh-CN" dirty="0"/>
+              <a:t/>
+            </a:r>
+          </a:p>
+          <a:p>
+            <a:r>
+              <a:rPr lang="zh-CN" dirty="0"/>
+              <a:t>看不到懂的地方，回讲义对应小节读一遍，再回来对着这页复述一次——能讲出来才算真懂。</a:t>
+            </a:r>
+          </a:p>
+        </p:txBody>
+      </p:sp>
     </p:spTree>
   </p:cSld>
   <p:clrMapOvr>
@@ -1187,6 +1821,104 @@
           </a:p>
         </p:txBody>
       </p:sp>
+      <p:sp>
+        <p:nvSpPr>
+          <p:cNvPr id="2" name="讲课提示"/>
+          <p:cNvSpPr txBox="1"/>
+          <p:nvPr/>
+        </p:nvSpPr>
+        <p:spPr>
+          <a:xfrm>
+            <a:off x="457200" y="457200"/>
+            <a:ext cx="6858000" cy="4800600"/>
+          </a:xfrm>
+          <a:prstGeom prst="rect">
+            <a:avLst/>
+          </a:prstGeom>
+        </p:spPr>
+        <p:txBody>
+          <a:bodyPr wrap="square"/>
+          <a:lstStyle/>
+          <a:p>
+            <a:r>
+              <a:rPr lang="zh-CN" dirty="0"/>
+              <a:t>第 54 节 · parametrize、测试类与运行命令</a:t>
+            </a:r>
+          </a:p>
+          <a:p>
+            <a:r>
+              <a:rPr lang="zh-CN" dirty="0"/>
+              <a:t>单元 10 · 测试代码 · W12</a:t>
+            </a:r>
+          </a:p>
+          <a:p>
+            <a:r>
+              <a:rPr lang="zh-CN" dirty="0"/>
+              <a:t/>
+            </a:r>
+          </a:p>
+          <a:p>
+            <a:r>
+              <a:rPr lang="zh-CN" dirty="0"/>
+              <a:t>学习目标：会用 parametrize 一次测多组数据，掌握测试类与常用命令</a:t>
+            </a:r>
+          </a:p>
+          <a:p>
+            <a:r>
+              <a:rPr lang="zh-CN" dirty="0"/>
+              <a:t/>
+            </a:r>
+          </a:p>
+          <a:p>
+            <a:r>
+              <a:rPr lang="zh-CN" dirty="0"/>
+              <a:t>课堂实操（40 分钟，不看答案）：</a:t>
+            </a:r>
+          </a:p>
+          <a:p>
+            <a:r>
+              <a:rPr lang="zh-CN" dirty="0"/>
+              <a:t>· 把 5 条相似测试合并成一条 parametrize</a:t>
+            </a:r>
+          </a:p>
+          <a:p>
+            <a:r>
+              <a:rPr lang="zh-CN" dirty="0"/>
+              <a:t>· 跑一次完整 pytest 并读懂输出</a:t>
+            </a:r>
+          </a:p>
+          <a:p>
+            <a:r>
+              <a:rPr lang="zh-CN" dirty="0"/>
+              <a:t/>
+            </a:r>
+          </a:p>
+          <a:p>
+            <a:r>
+              <a:rPr lang="zh-CN" dirty="0"/>
+              <a:t>课后作业：</a:t>
+            </a:r>
+          </a:p>
+          <a:p>
+            <a:r>
+              <a:rPr lang="zh-CN" dirty="0"/>
+              <a:t>· 完成动手练习 10-6 ~ 10-8</a:t>
+            </a:r>
+          </a:p>
+          <a:p>
+            <a:r>
+              <a:rPr lang="zh-CN" dirty="0"/>
+              <a:t/>
+            </a:r>
+          </a:p>
+          <a:p>
+            <a:r>
+              <a:rPr lang="zh-CN" dirty="0"/>
+              <a:t>节奏：讲 20 分钟 → 学员自己敲 40 分钟（不看答案）→ 对讲评自查 20 分钟 → 写作业 10 分钟。</a:t>
+            </a:r>
+          </a:p>
+        </p:txBody>
+      </p:sp>
     </p:spTree>
   </p:cSld>
   <p:clrMapOvr>
@@ -1280,6 +2012,74 @@
           </a:p>
         </p:txBody>
       </p:sp>
+      <p:sp>
+        <p:nvSpPr>
+          <p:cNvPr id="2" name="讲课提示"/>
+          <p:cNvSpPr txBox="1"/>
+          <p:nvPr/>
+        </p:nvSpPr>
+        <p:spPr>
+          <a:xfrm>
+            <a:off x="457200" y="457200"/>
+            <a:ext cx="6858000" cy="4800600"/>
+          </a:xfrm>
+          <a:prstGeom prst="rect">
+            <a:avLst/>
+          </a:prstGeom>
+        </p:spPr>
+        <p:txBody>
+          <a:bodyPr wrap="square"/>
+          <a:lstStyle/>
+          <a:p>
+            <a:r>
+              <a:rPr lang="zh-CN" dirty="0"/>
+              <a:t>第 54 节 · 核心知识点：parametrize、测试类与运行命令</a:t>
+            </a:r>
+          </a:p>
+          <a:p>
+            <a:r>
+              <a:rPr lang="zh-CN" dirty="0"/>
+              <a:t/>
+            </a:r>
+          </a:p>
+          <a:p>
+            <a:r>
+              <a:rPr lang="zh-CN" dirty="0"/>
+              <a:t>讲这一页时：先让学生说出上节课的结论，再逐块讲要点。</a:t>
+            </a:r>
+          </a:p>
+          <a:p>
+            <a:r>
+              <a:rPr lang="zh-CN" dirty="0"/>
+              <a:t>每讲完一块，问一句「这一步如果写错了，报错会长什么样？」——把错误提前讲。</a:t>
+            </a:r>
+          </a:p>
+          <a:p>
+            <a:r>
+              <a:rPr lang="zh-CN" dirty="0"/>
+              <a:t/>
+            </a:r>
+          </a:p>
+          <a:p>
+            <a:r>
+              <a:rPr lang="zh-CN" dirty="0"/>
+              <a:t>本节目标：会用 parametrize 一次测多组数据，掌握测试类与常用命令</a:t>
+            </a:r>
+          </a:p>
+          <a:p>
+            <a:r>
+              <a:rPr lang="zh-CN" dirty="0"/>
+              <a:t/>
+            </a:r>
+          </a:p>
+          <a:p>
+            <a:r>
+              <a:rPr lang="zh-CN" dirty="0"/>
+              <a:t>看不到懂的地方，回讲义对应小节读一遍，再回来对着这页复述一次——能讲出来才算真懂。</a:t>
+            </a:r>
+          </a:p>
+        </p:txBody>
+      </p:sp>
     </p:spTree>
   </p:cSld>
   <p:clrMapOvr>
@@ -1403,6 +2203,104 @@
           </a:p>
         </p:txBody>
       </p:sp>
+      <p:sp>
+        <p:nvSpPr>
+          <p:cNvPr id="2" name="讲课提示"/>
+          <p:cNvSpPr txBox="1"/>
+          <p:nvPr/>
+        </p:nvSpPr>
+        <p:spPr>
+          <a:xfrm>
+            <a:off x="457200" y="457200"/>
+            <a:ext cx="6858000" cy="4800600"/>
+          </a:xfrm>
+          <a:prstGeom prst="rect">
+            <a:avLst/>
+          </a:prstGeom>
+        </p:spPr>
+        <p:txBody>
+          <a:bodyPr wrap="square"/>
+          <a:lstStyle/>
+          <a:p>
+            <a:r>
+              <a:rPr lang="zh-CN" dirty="0"/>
+              <a:t>第 55 节 · 测试夹具与示例串讲</a:t>
+            </a:r>
+          </a:p>
+          <a:p>
+            <a:r>
+              <a:rPr lang="zh-CN" dirty="0"/>
+              <a:t>单元 10 · 测试代码 · W12</a:t>
+            </a:r>
+          </a:p>
+          <a:p>
+            <a:r>
+              <a:rPr lang="zh-CN" dirty="0"/>
+              <a:t/>
+            </a:r>
+          </a:p>
+          <a:p>
+            <a:r>
+              <a:rPr lang="zh-CN" dirty="0"/>
+              <a:t>学习目标：理解夹具解决什么问题，能读懂 pytest 的输出报告</a:t>
+            </a:r>
+          </a:p>
+          <a:p>
+            <a:r>
+              <a:rPr lang="zh-CN" dirty="0"/>
+              <a:t/>
+            </a:r>
+          </a:p>
+          <a:p>
+            <a:r>
+              <a:rPr lang="zh-CN" dirty="0"/>
+              <a:t>课堂实操（40 分钟，不看答案）：</a:t>
+            </a:r>
+          </a:p>
+          <a:p>
+            <a:r>
+              <a:rPr lang="zh-CN" dirty="0"/>
+              <a:t>· 对照示例讲清测试夹具的用途</a:t>
+            </a:r>
+          </a:p>
+          <a:p>
+            <a:r>
+              <a:rPr lang="zh-CN" dirty="0"/>
+              <a:t>· 故意让一个测试类失败并读懂报告</a:t>
+            </a:r>
+          </a:p>
+          <a:p>
+            <a:r>
+              <a:rPr lang="zh-CN" dirty="0"/>
+              <a:t/>
+            </a:r>
+          </a:p>
+          <a:p>
+            <a:r>
+              <a:rPr lang="zh-CN" dirty="0"/>
+              <a:t>课后作业：</a:t>
+            </a:r>
+          </a:p>
+          <a:p>
+            <a:r>
+              <a:rPr lang="zh-CN" dirty="0"/>
+              <a:t>· 给单元 7/8/9 写过的代码补测试（共 8 条以上）</a:t>
+            </a:r>
+          </a:p>
+          <a:p>
+            <a:r>
+              <a:rPr lang="zh-CN" dirty="0"/>
+              <a:t/>
+            </a:r>
+          </a:p>
+          <a:p>
+            <a:r>
+              <a:rPr lang="zh-CN" dirty="0"/>
+              <a:t>节奏：讲 20 分钟 → 学员自己敲 40 分钟（不看答案）→ 对讲评自查 20 分钟 → 写作业 10 分钟。</a:t>
+            </a:r>
+          </a:p>
+        </p:txBody>
+      </p:sp>
     </p:spTree>
   </p:cSld>
   <p:clrMapOvr>
@@ -1428,6 +2326,74 @@
           <a:chExt cx="0" cy="0"/>
         </a:xfrm>
       </p:grpSpPr>
+      <p:sp>
+        <p:nvSpPr>
+          <p:cNvPr id="2" name="讲课提示"/>
+          <p:cNvSpPr txBox="1"/>
+          <p:nvPr/>
+        </p:nvSpPr>
+        <p:spPr>
+          <a:xfrm>
+            <a:off x="457200" y="457200"/>
+            <a:ext cx="6858000" cy="4800600"/>
+          </a:xfrm>
+          <a:prstGeom prst="rect">
+            <a:avLst/>
+          </a:prstGeom>
+        </p:spPr>
+        <p:txBody>
+          <a:bodyPr wrap="square"/>
+          <a:lstStyle/>
+          <a:p>
+            <a:r>
+              <a:rPr lang="zh-CN" dirty="0"/>
+              <a:t>第 55 节 · 核心知识点：测试夹具与示例串讲</a:t>
+            </a:r>
+          </a:p>
+          <a:p>
+            <a:r>
+              <a:rPr lang="zh-CN" dirty="0"/>
+              <a:t/>
+            </a:r>
+          </a:p>
+          <a:p>
+            <a:r>
+              <a:rPr lang="zh-CN" dirty="0"/>
+              <a:t>讲这一页时：先让学生说出上节课的结论，再逐块讲要点。</a:t>
+            </a:r>
+          </a:p>
+          <a:p>
+            <a:r>
+              <a:rPr lang="zh-CN" dirty="0"/>
+              <a:t>每讲完一块，问一句「这一步如果写错了，报错会长什么样？」——把错误提前讲。</a:t>
+            </a:r>
+          </a:p>
+          <a:p>
+            <a:r>
+              <a:rPr lang="zh-CN" dirty="0"/>
+              <a:t/>
+            </a:r>
+          </a:p>
+          <a:p>
+            <a:r>
+              <a:rPr lang="zh-CN" dirty="0"/>
+              <a:t>本节目标：理解夹具解决什么问题，能读懂 pytest 的输出报告</a:t>
+            </a:r>
+          </a:p>
+          <a:p>
+            <a:r>
+              <a:rPr lang="zh-CN" dirty="0"/>
+              <a:t/>
+            </a:r>
+          </a:p>
+          <a:p>
+            <a:r>
+              <a:rPr lang="zh-CN" dirty="0"/>
+              <a:t>看不到懂的地方，回讲义对应小节读一遍，再回来对着这页复述一次——能讲出来才算真懂。</a:t>
+            </a:r>
+          </a:p>
+        </p:txBody>
+      </p:sp>
       <p:sp>
         <p:nvSpPr>
           <p:cNvPr id="2" name="讲课提示"/>

--- a/python-course-ppt/逐节课件/Python讲授课件-单元10.pptx
+++ b/python-course-ppt/逐节课件/Python讲授课件-单元10.pptx
@@ -238,2238 +238,6 @@
 </p:notesMaster>
 </file>
 
-<file path=ppt/notesSlides/notesSlide1.xml><?xml version="1.0" encoding="utf-8"?>
-<p:notes xmlns:a="http://schemas.openxmlformats.org/drawingml/2006/main" xmlns:p="http://schemas.openxmlformats.org/presentationml/2006/main" xmlns:r="http://schemas.openxmlformats.org/officeDocument/2006/relationships">
-  <p:cSld>
-    <p:spTree>
-      <p:nvGrpSpPr>
-        <p:cNvPr id="1" name=""/>
-        <p:cNvGrpSpPr/>
-        <p:nvPr/>
-      </p:nvGrpSpPr>
-      <p:grpSpPr>
-        <a:xfrm>
-          <a:off x="0" y="0"/>
-          <a:ext cx="0" cy="0"/>
-          <a:chOff x="0" y="0"/>
-          <a:chExt cx="0" cy="0"/>
-        </a:xfrm>
-      </p:grpSpPr>
-      <p:sp>
-        <p:nvSpPr>
-          <p:cNvPr id="2" name="讲课提示"/>
-          <p:cNvSpPr txBox="1"/>
-          <p:nvPr/>
-        </p:nvSpPr>
-        <p:spPr>
-          <a:xfrm>
-            <a:off x="457200" y="457200"/>
-            <a:ext cx="6858000" cy="4800600"/>
-          </a:xfrm>
-          <a:prstGeom prst="rect">
-            <a:avLst/>
-          </a:prstGeom>
-        </p:spPr>
-        <p:txBody>
-          <a:bodyPr wrap="square"/>
-          <a:lstStyle/>
-          <a:p>
-            <a:r>
-              <a:rPr lang="zh-CN" dirty="0"/>
-              <a:t>单元 10 · 单元 10 · 测试代码</a:t>
-            </a:r>
-          </a:p>
-          <a:p>
-            <a:r>
-              <a:rPr lang="zh-CN" dirty="0"/>
-              <a:t/>
-            </a:r>
-          </a:p>
-          <a:p>
-            <a:r>
-              <a:rPr lang="zh-CN" dirty="0"/>
-              <a:t>本单元包含以下课节：</a:t>
-            </a:r>
-          </a:p>
-          <a:p>
-            <a:r>
-              <a:rPr lang="zh-CN" dirty="0"/>
-              <a:t>· 第 52 节 为什么需要测试与三条命名规则</a:t>
-            </a:r>
-          </a:p>
-          <a:p>
-            <a:r>
-              <a:rPr lang="zh-CN" dirty="0"/>
-              <a:t>· 第 53 节 assert 与测试用例设计</a:t>
-            </a:r>
-          </a:p>
-          <a:p>
-            <a:r>
-              <a:rPr lang="zh-CN" dirty="0"/>
-              <a:t>· 第 54 节 parametrize、测试类与运行命令</a:t>
-            </a:r>
-          </a:p>
-          <a:p>
-            <a:r>
-              <a:rPr lang="zh-CN" dirty="0"/>
-              <a:t>· 第 55 节 测试夹具与示例串讲</a:t>
-            </a:r>
-          </a:p>
-          <a:p>
-            <a:r>
-              <a:rPr lang="zh-CN" dirty="0"/>
-              <a:t>· 第 56 节 动手实战、答案与验收</a:t>
-            </a:r>
-          </a:p>
-          <a:p>
-            <a:r>
-              <a:rPr lang="zh-CN" dirty="0"/>
-              <a:t/>
-            </a:r>
-          </a:p>
-          <a:p>
-            <a:r>
-              <a:rPr lang="zh-CN" dirty="0"/>
-              <a:t>开场用 3 分钟讲清：这个单元学完能做出什么，最后会被关卡怎么验。</a:t>
-            </a:r>
-          </a:p>
-        </p:txBody>
-      </p:sp>
-      <p:sp>
-        <p:nvSpPr>
-          <p:cNvPr id="2" name="讲课提示"/>
-          <p:cNvSpPr txBox="1"/>
-          <p:nvPr/>
-        </p:nvSpPr>
-        <p:spPr>
-          <a:xfrm>
-            <a:off x="457200" y="457200"/>
-            <a:ext cx="6858000" cy="4800600"/>
-          </a:xfrm>
-          <a:prstGeom prst="rect">
-            <a:avLst/>
-          </a:prstGeom>
-        </p:spPr>
-        <p:txBody>
-          <a:bodyPr wrap="square"/>
-          <a:lstStyle/>
-          <a:p>
-            <a:r>
-              <a:rPr lang="zh-CN" dirty="0"/>
-              <a:t>单元 10 · 单元 10 · 测试代码</a:t>
-            </a:r>
-          </a:p>
-          <a:p>
-            <a:r>
-              <a:rPr lang="zh-CN" dirty="0"/>
-              <a:t/>
-            </a:r>
-          </a:p>
-          <a:p>
-            <a:r>
-              <a:rPr lang="zh-CN" dirty="0"/>
-              <a:t>本单元包含以下课节：</a:t>
-            </a:r>
-          </a:p>
-          <a:p>
-            <a:r>
-              <a:rPr lang="zh-CN" dirty="0"/>
-              <a:t>· 第 52 节 为什么需要测试与三条命名规则</a:t>
-            </a:r>
-          </a:p>
-          <a:p>
-            <a:r>
-              <a:rPr lang="zh-CN" dirty="0"/>
-              <a:t>· 第 53 节 assert 与测试用例设计</a:t>
-            </a:r>
-          </a:p>
-          <a:p>
-            <a:r>
-              <a:rPr lang="zh-CN" dirty="0"/>
-              <a:t>· 第 54 节 parametrize、测试类与运行命令</a:t>
-            </a:r>
-          </a:p>
-          <a:p>
-            <a:r>
-              <a:rPr lang="zh-CN" dirty="0"/>
-              <a:t>· 第 55 节 测试夹具与示例串讲</a:t>
-            </a:r>
-          </a:p>
-          <a:p>
-            <a:r>
-              <a:rPr lang="zh-CN" dirty="0"/>
-              <a:t>· 第 56 节 动手实战、答案与验收</a:t>
-            </a:r>
-          </a:p>
-          <a:p>
-            <a:r>
-              <a:rPr lang="zh-CN" dirty="0"/>
-              <a:t/>
-            </a:r>
-          </a:p>
-          <a:p>
-            <a:r>
-              <a:rPr lang="zh-CN" dirty="0"/>
-              <a:t>开场用 3 分钟讲清：这个单元学完能做出什么，最后会被关卡怎么验。</a:t>
-            </a:r>
-          </a:p>
-        </p:txBody>
-      </p:sp>
-    </p:spTree>
-  </p:cSld>
-  <p:clrMapOvr>
-    <a:masterClrMapping/>
-  </p:clrMapOvr>
-</p:notes>
-</file>
-
-<file path=ppt/notesSlides/notesSlide10.xml><?xml version="1.0" encoding="utf-8"?>
-<p:notes xmlns:a="http://schemas.openxmlformats.org/drawingml/2006/main" xmlns:p="http://schemas.openxmlformats.org/presentationml/2006/main" xmlns:r="http://schemas.openxmlformats.org/officeDocument/2006/relationships">
-  <p:cSld>
-    <p:spTree>
-      <p:nvGrpSpPr>
-        <p:cNvPr id="1" name=""/>
-        <p:cNvGrpSpPr/>
-        <p:nvPr/>
-      </p:nvGrpSpPr>
-      <p:grpSpPr>
-        <a:xfrm>
-          <a:off x="0" y="0"/>
-          <a:ext cx="0" cy="0"/>
-          <a:chOff x="0" y="0"/>
-          <a:chExt cx="0" cy="0"/>
-        </a:xfrm>
-      </p:grpSpPr>
-      <p:sp>
-        <p:nvSpPr>
-          <p:cNvPr id="2" name="讲课提示"/>
-          <p:cNvSpPr txBox="1"/>
-          <p:nvPr/>
-        </p:nvSpPr>
-        <p:spPr>
-          <a:xfrm>
-            <a:off x="457200" y="457200"/>
-            <a:ext cx="6858000" cy="4800600"/>
-          </a:xfrm>
-          <a:prstGeom prst="rect">
-            <a:avLst/>
-          </a:prstGeom>
-        </p:spPr>
-        <p:txBody>
-          <a:bodyPr wrap="square"/>
-          <a:lstStyle/>
-          <a:p>
-            <a:r>
-              <a:rPr lang="zh-CN" dirty="0"/>
-              <a:t>第 56 节 · 动手实战、答案与验收</a:t>
-            </a:r>
-          </a:p>
-          <a:p>
-            <a:r>
-              <a:rPr lang="zh-CN" dirty="0"/>
-              <a:t>单元 10 · 测试代码 · W12</a:t>
-            </a:r>
-          </a:p>
-          <a:p>
-            <a:r>
-              <a:rPr lang="zh-CN" dirty="0"/>
-              <a:t/>
-            </a:r>
-          </a:p>
-          <a:p>
-            <a:r>
-              <a:rPr lang="zh-CN" dirty="0"/>
-              <a:t>学习目标：独立完成单元 10 练习，能为函数写出完整测试套件</a:t>
-            </a:r>
-          </a:p>
-          <a:p>
-            <a:r>
-              <a:rPr lang="zh-CN" dirty="0"/>
-              <a:t/>
-            </a:r>
-          </a:p>
-          <a:p>
-            <a:r>
-              <a:rPr lang="zh-CN" dirty="0"/>
-              <a:t>课堂实操（40 分钟，不看答案）：</a:t>
-            </a:r>
-          </a:p>
-          <a:p>
-            <a:r>
-              <a:rPr lang="zh-CN" dirty="0"/>
-              <a:t>· ★ 动手项目 11.1–11.3 投票分析器测试</a:t>
-            </a:r>
-          </a:p>
-          <a:p>
-            <a:r>
-              <a:rPr lang="zh-CN" dirty="0"/>
-              <a:t>· 限时 30 分钟独立完成基础档</a:t>
-            </a:r>
-          </a:p>
-          <a:p>
-            <a:r>
-              <a:rPr lang="zh-CN" dirty="0"/>
-              <a:t>· 逐题对照答案并打勾验收自测</a:t>
-            </a:r>
-          </a:p>
-          <a:p>
-            <a:r>
-              <a:rPr lang="zh-CN" dirty="0"/>
-              <a:t/>
-            </a:r>
-          </a:p>
-          <a:p>
-            <a:r>
-              <a:rPr lang="zh-CN" dirty="0"/>
-              <a:t>课后作业：</a:t>
-            </a:r>
-          </a:p>
-          <a:p>
-            <a:r>
-              <a:rPr lang="zh-CN" dirty="0"/>
-              <a:t>· 产出：pytest 套件 ≥10 条</a:t>
-            </a:r>
-          </a:p>
-          <a:p>
-            <a:r>
-              <a:rPr lang="zh-CN" dirty="0"/>
-              <a:t>· 完成本单元小结与产出检查</a:t>
-            </a:r>
-          </a:p>
-          <a:p>
-            <a:r>
-              <a:rPr lang="zh-CN" dirty="0"/>
-              <a:t/>
-            </a:r>
-          </a:p>
-          <a:p>
-            <a:r>
-              <a:rPr lang="zh-CN" dirty="0"/>
-              <a:t>节奏：讲 20 分钟 → 学员自己敲 40 分钟（不看答案）→ 对讲评自查 20 分钟 → 写作业 10 分钟。</a:t>
-            </a:r>
-          </a:p>
-        </p:txBody>
-      </p:sp>
-      <p:sp>
-        <p:nvSpPr>
-          <p:cNvPr id="2" name="讲课提示"/>
-          <p:cNvSpPr txBox="1"/>
-          <p:nvPr/>
-        </p:nvSpPr>
-        <p:spPr>
-          <a:xfrm>
-            <a:off x="457200" y="457200"/>
-            <a:ext cx="6858000" cy="4800600"/>
-          </a:xfrm>
-          <a:prstGeom prst="rect">
-            <a:avLst/>
-          </a:prstGeom>
-        </p:spPr>
-        <p:txBody>
-          <a:bodyPr wrap="square"/>
-          <a:lstStyle/>
-          <a:p>
-            <a:r>
-              <a:rPr lang="zh-CN" dirty="0"/>
-              <a:t>第 56 节 · 动手实战、答案与验收</a:t>
-            </a:r>
-          </a:p>
-          <a:p>
-            <a:r>
-              <a:rPr lang="zh-CN" dirty="0"/>
-              <a:t>单元 10 · 测试代码 · W12</a:t>
-            </a:r>
-          </a:p>
-          <a:p>
-            <a:r>
-              <a:rPr lang="zh-CN" dirty="0"/>
-              <a:t/>
-            </a:r>
-          </a:p>
-          <a:p>
-            <a:r>
-              <a:rPr lang="zh-CN" dirty="0"/>
-              <a:t>学习目标：独立完成单元 10 练习，能为函数写出完整测试套件</a:t>
-            </a:r>
-          </a:p>
-          <a:p>
-            <a:r>
-              <a:rPr lang="zh-CN" dirty="0"/>
-              <a:t/>
-            </a:r>
-          </a:p>
-          <a:p>
-            <a:r>
-              <a:rPr lang="zh-CN" dirty="0"/>
-              <a:t>课堂实操（40 分钟，不看答案）：</a:t>
-            </a:r>
-          </a:p>
-          <a:p>
-            <a:r>
-              <a:rPr lang="zh-CN" dirty="0"/>
-              <a:t>· ★ 动手项目 11.1–11.3 投票分析器测试</a:t>
-            </a:r>
-          </a:p>
-          <a:p>
-            <a:r>
-              <a:rPr lang="zh-CN" dirty="0"/>
-              <a:t>· 限时 30 分钟独立完成基础档</a:t>
-            </a:r>
-          </a:p>
-          <a:p>
-            <a:r>
-              <a:rPr lang="zh-CN" dirty="0"/>
-              <a:t>· 逐题对照答案并打勾验收自测</a:t>
-            </a:r>
-          </a:p>
-          <a:p>
-            <a:r>
-              <a:rPr lang="zh-CN" dirty="0"/>
-              <a:t/>
-            </a:r>
-          </a:p>
-          <a:p>
-            <a:r>
-              <a:rPr lang="zh-CN" dirty="0"/>
-              <a:t>课后作业：</a:t>
-            </a:r>
-          </a:p>
-          <a:p>
-            <a:r>
-              <a:rPr lang="zh-CN" dirty="0"/>
-              <a:t>· 产出：pytest 套件 ≥10 条</a:t>
-            </a:r>
-          </a:p>
-          <a:p>
-            <a:r>
-              <a:rPr lang="zh-CN" dirty="0"/>
-              <a:t>· 完成本单元小结与产出检查</a:t>
-            </a:r>
-          </a:p>
-          <a:p>
-            <a:r>
-              <a:rPr lang="zh-CN" dirty="0"/>
-              <a:t/>
-            </a:r>
-          </a:p>
-          <a:p>
-            <a:r>
-              <a:rPr lang="zh-CN" dirty="0"/>
-              <a:t>节奏：讲 20 分钟 → 学员自己敲 40 分钟（不看答案）→ 对讲评自查 20 分钟 → 写作业 10 分钟。</a:t>
-            </a:r>
-          </a:p>
-        </p:txBody>
-      </p:sp>
-    </p:spTree>
-  </p:cSld>
-  <p:clrMapOvr>
-    <a:masterClrMapping/>
-  </p:clrMapOvr>
-</p:notes>
-</file>
-
-<file path=ppt/notesSlides/notesSlide11.xml><?xml version="1.0" encoding="utf-8"?>
-<p:notes xmlns:a="http://schemas.openxmlformats.org/drawingml/2006/main" xmlns:p="http://schemas.openxmlformats.org/presentationml/2006/main" xmlns:r="http://schemas.openxmlformats.org/officeDocument/2006/relationships">
-  <p:cSld>
-    <p:spTree>
-      <p:nvGrpSpPr>
-        <p:cNvPr id="1" name=""/>
-        <p:cNvGrpSpPr/>
-        <p:nvPr/>
-      </p:nvGrpSpPr>
-      <p:grpSpPr>
-        <a:xfrm>
-          <a:off x="0" y="0"/>
-          <a:ext cx="0" cy="0"/>
-          <a:chOff x="0" y="0"/>
-          <a:chExt cx="0" cy="0"/>
-        </a:xfrm>
-      </p:grpSpPr>
-      <p:sp>
-        <p:nvSpPr>
-          <p:cNvPr id="2" name="讲课提示"/>
-          <p:cNvSpPr txBox="1"/>
-          <p:nvPr/>
-        </p:nvSpPr>
-        <p:spPr>
-          <a:xfrm>
-            <a:off x="457200" y="457200"/>
-            <a:ext cx="6858000" cy="4800600"/>
-          </a:xfrm>
-          <a:prstGeom prst="rect">
-            <a:avLst/>
-          </a:prstGeom>
-        </p:spPr>
-        <p:txBody>
-          <a:bodyPr wrap="square"/>
-          <a:lstStyle/>
-          <a:p>
-            <a:r>
-              <a:rPr lang="zh-CN" dirty="0"/>
-              <a:t>第 56 节 · 核心知识点：动手实战、答案与验收</a:t>
-            </a:r>
-          </a:p>
-          <a:p>
-            <a:r>
-              <a:rPr lang="zh-CN" dirty="0"/>
-              <a:t/>
-            </a:r>
-          </a:p>
-          <a:p>
-            <a:r>
-              <a:rPr lang="zh-CN" dirty="0"/>
-              <a:t>讲这一页时：先让学生说出上节课的结论，再逐块讲要点。</a:t>
-            </a:r>
-          </a:p>
-          <a:p>
-            <a:r>
-              <a:rPr lang="zh-CN" dirty="0"/>
-              <a:t>每讲完一块，问一句「这一步如果写错了，报错会长什么样？」——把错误提前讲。</a:t>
-            </a:r>
-          </a:p>
-          <a:p>
-            <a:r>
-              <a:rPr lang="zh-CN" dirty="0"/>
-              <a:t/>
-            </a:r>
-          </a:p>
-          <a:p>
-            <a:r>
-              <a:rPr lang="zh-CN" dirty="0"/>
-              <a:t>本节目标：独立完成单元 10 练习，能为函数写出完整测试套件</a:t>
-            </a:r>
-          </a:p>
-          <a:p>
-            <a:r>
-              <a:rPr lang="zh-CN" dirty="0"/>
-              <a:t/>
-            </a:r>
-          </a:p>
-          <a:p>
-            <a:r>
-              <a:rPr lang="zh-CN" dirty="0"/>
-              <a:t>看不到懂的地方，回讲义对应小节读一遍，再回来对着这页复述一次——能讲出来才算真懂。</a:t>
-            </a:r>
-          </a:p>
-        </p:txBody>
-      </p:sp>
-      <p:sp>
-        <p:nvSpPr>
-          <p:cNvPr id="2" name="讲课提示"/>
-          <p:cNvSpPr txBox="1"/>
-          <p:nvPr/>
-        </p:nvSpPr>
-        <p:spPr>
-          <a:xfrm>
-            <a:off x="457200" y="457200"/>
-            <a:ext cx="6858000" cy="4800600"/>
-          </a:xfrm>
-          <a:prstGeom prst="rect">
-            <a:avLst/>
-          </a:prstGeom>
-        </p:spPr>
-        <p:txBody>
-          <a:bodyPr wrap="square"/>
-          <a:lstStyle/>
-          <a:p>
-            <a:r>
-              <a:rPr lang="zh-CN" dirty="0"/>
-              <a:t>第 56 节 · 核心知识点：动手实战、答案与验收</a:t>
-            </a:r>
-          </a:p>
-          <a:p>
-            <a:r>
-              <a:rPr lang="zh-CN" dirty="0"/>
-              <a:t/>
-            </a:r>
-          </a:p>
-          <a:p>
-            <a:r>
-              <a:rPr lang="zh-CN" dirty="0"/>
-              <a:t>讲这一页时：先让学生说出上节课的结论，再逐块讲要点。</a:t>
-            </a:r>
-          </a:p>
-          <a:p>
-            <a:r>
-              <a:rPr lang="zh-CN" dirty="0"/>
-              <a:t>每讲完一块，问一句「这一步如果写错了，报错会长什么样？」——把错误提前讲。</a:t>
-            </a:r>
-          </a:p>
-          <a:p>
-            <a:r>
-              <a:rPr lang="zh-CN" dirty="0"/>
-              <a:t/>
-            </a:r>
-          </a:p>
-          <a:p>
-            <a:r>
-              <a:rPr lang="zh-CN" dirty="0"/>
-              <a:t>本节目标：独立完成单元 10 练习，能为函数写出完整测试套件</a:t>
-            </a:r>
-          </a:p>
-          <a:p>
-            <a:r>
-              <a:rPr lang="zh-CN" dirty="0"/>
-              <a:t/>
-            </a:r>
-          </a:p>
-          <a:p>
-            <a:r>
-              <a:rPr lang="zh-CN" dirty="0"/>
-              <a:t>看不到懂的地方，回讲义对应小节读一遍，再回来对着这页复述一次——能讲出来才算真懂。</a:t>
-            </a:r>
-          </a:p>
-        </p:txBody>
-      </p:sp>
-    </p:spTree>
-  </p:cSld>
-  <p:clrMapOvr>
-    <a:masterClrMapping/>
-  </p:clrMapOvr>
-</p:notes>
-</file>
-
-<file path=ppt/notesSlides/notesSlide12.xml><?xml version="1.0" encoding="utf-8"?>
-<p:notes xmlns:a="http://schemas.openxmlformats.org/drawingml/2006/main" xmlns:p="http://schemas.openxmlformats.org/presentationml/2006/main" xmlns:r="http://schemas.openxmlformats.org/officeDocument/2006/relationships">
-  <p:cSld>
-    <p:spTree>
-      <p:nvGrpSpPr>
-        <p:cNvPr id="1" name=""/>
-        <p:cNvGrpSpPr/>
-        <p:nvPr/>
-      </p:nvGrpSpPr>
-      <p:grpSpPr>
-        <a:xfrm>
-          <a:off x="0" y="0"/>
-          <a:ext cx="0" cy="0"/>
-          <a:chOff x="0" y="0"/>
-          <a:chExt cx="0" cy="0"/>
-        </a:xfrm>
-      </p:grpSpPr>
-      <p:sp>
-        <p:nvSpPr>
-          <p:cNvPr id="2" name="讲课提示"/>
-          <p:cNvSpPr txBox="1"/>
-          <p:nvPr/>
-        </p:nvSpPr>
-        <p:spPr>
-          <a:xfrm>
-            <a:off x="457200" y="457200"/>
-            <a:ext cx="6858000" cy="4800600"/>
-          </a:xfrm>
-          <a:prstGeom prst="rect">
-            <a:avLst/>
-          </a:prstGeom>
-        </p:spPr>
-        <p:txBody>
-          <a:bodyPr wrap="square"/>
-          <a:lstStyle/>
-          <a:p>
-            <a:r>
-              <a:rPr lang="zh-CN" dirty="0"/>
-              <a:t>单元 10 小结 · 单元 10 · 小结</a:t>
-            </a:r>
-          </a:p>
-          <a:p>
-            <a:r>
-              <a:rPr lang="zh-CN" dirty="0"/>
-              <a:t/>
-            </a:r>
-          </a:p>
-          <a:p>
-            <a:r>
-              <a:rPr lang="zh-CN" dirty="0"/>
-              <a:t>收尾动作：让学生合上讲义，口述本单元三个最重要的结论；说不出来的，回对应课节。</a:t>
-            </a:r>
-          </a:p>
-          <a:p>
-            <a:r>
-              <a:rPr lang="zh-CN" dirty="0"/>
-              <a:t>然后当场勾一遍本单元课节的「已完成」，没打勾的进下一单元前补掉。</a:t>
-            </a:r>
-          </a:p>
-        </p:txBody>
-      </p:sp>
-      <p:sp>
-        <p:nvSpPr>
-          <p:cNvPr id="2" name="讲课提示"/>
-          <p:cNvSpPr txBox="1"/>
-          <p:nvPr/>
-        </p:nvSpPr>
-        <p:spPr>
-          <a:xfrm>
-            <a:off x="457200" y="457200"/>
-            <a:ext cx="6858000" cy="4800600"/>
-          </a:xfrm>
-          <a:prstGeom prst="rect">
-            <a:avLst/>
-          </a:prstGeom>
-        </p:spPr>
-        <p:txBody>
-          <a:bodyPr wrap="square"/>
-          <a:lstStyle/>
-          <a:p>
-            <a:r>
-              <a:rPr lang="zh-CN" dirty="0"/>
-              <a:t>单元 10 小结 · 单元 10 · 小结</a:t>
-            </a:r>
-          </a:p>
-          <a:p>
-            <a:r>
-              <a:rPr lang="zh-CN" dirty="0"/>
-              <a:t/>
-            </a:r>
-          </a:p>
-          <a:p>
-            <a:r>
-              <a:rPr lang="zh-CN" dirty="0"/>
-              <a:t>收尾动作：让学生合上讲义，口述本单元三个最重要的结论；说不出来的，回对应课节。</a:t>
-            </a:r>
-          </a:p>
-          <a:p>
-            <a:r>
-              <a:rPr lang="zh-CN" dirty="0"/>
-              <a:t>然后当场勾一遍本单元课节的「已完成」，没打勾的进下一单元前补掉。</a:t>
-            </a:r>
-          </a:p>
-        </p:txBody>
-      </p:sp>
-    </p:spTree>
-  </p:cSld>
-  <p:clrMapOvr>
-    <a:masterClrMapping/>
-  </p:clrMapOvr>
-</p:notes>
-</file>
-
-<file path=ppt/notesSlides/notesSlide2.xml><?xml version="1.0" encoding="utf-8"?>
-<p:notes xmlns:a="http://schemas.openxmlformats.org/drawingml/2006/main" xmlns:p="http://schemas.openxmlformats.org/presentationml/2006/main" xmlns:r="http://schemas.openxmlformats.org/officeDocument/2006/relationships">
-  <p:cSld>
-    <p:spTree>
-      <p:nvGrpSpPr>
-        <p:cNvPr id="1" name=""/>
-        <p:cNvGrpSpPr/>
-        <p:nvPr/>
-      </p:nvGrpSpPr>
-      <p:grpSpPr>
-        <a:xfrm>
-          <a:off x="0" y="0"/>
-          <a:ext cx="0" cy="0"/>
-          <a:chOff x="0" y="0"/>
-          <a:chExt cx="0" cy="0"/>
-        </a:xfrm>
-      </p:grpSpPr>
-      <p:sp>
-        <p:nvSpPr>
-          <p:cNvPr id="2" name="讲课提示"/>
-          <p:cNvSpPr txBox="1"/>
-          <p:nvPr/>
-        </p:nvSpPr>
-        <p:spPr>
-          <a:xfrm>
-            <a:off x="457200" y="457200"/>
-            <a:ext cx="6858000" cy="4800600"/>
-          </a:xfrm>
-          <a:prstGeom prst="rect">
-            <a:avLst/>
-          </a:prstGeom>
-        </p:spPr>
-        <p:txBody>
-          <a:bodyPr wrap="square"/>
-          <a:lstStyle/>
-          <a:p>
-            <a:r>
-              <a:rPr lang="zh-CN" dirty="0"/>
-              <a:t>第 52 节 · 为什么需要测试与三条命名规则</a:t>
-            </a:r>
-          </a:p>
-          <a:p>
-            <a:r>
-              <a:rPr lang="zh-CN" dirty="0"/>
-              <a:t>单元 10 · 测试代码 · W12</a:t>
-            </a:r>
-          </a:p>
-          <a:p>
-            <a:r>
-              <a:rPr lang="zh-CN" dirty="0"/>
-              <a:t/>
-            </a:r>
-          </a:p>
-          <a:p>
-            <a:r>
-              <a:rPr lang="zh-CN" dirty="0"/>
-              <a:t>学习目标：理解 Bug 分两种，自动化测试的价值在改代码之前</a:t>
-            </a:r>
-          </a:p>
-          <a:p>
-            <a:r>
-              <a:rPr lang="zh-CN" dirty="0"/>
-              <a:t/>
-            </a:r>
-          </a:p>
-          <a:p>
-            <a:r>
-              <a:rPr lang="zh-CN" dirty="0"/>
-              <a:t>课堂实操（40 分钟，不看答案）：</a:t>
-            </a:r>
-          </a:p>
-          <a:p>
-            <a:r>
-              <a:rPr lang="zh-CN" dirty="0"/>
-              <a:t>· 先故意写一个错函数，看没有测试时能撑多久</a:t>
-            </a:r>
-          </a:p>
-          <a:p>
-            <a:r>
-              <a:rPr lang="zh-CN" dirty="0"/>
-              <a:t>· 把测试函数改成不符合命名规则，看能不能被收集</a:t>
-            </a:r>
-          </a:p>
-          <a:p>
-            <a:r>
-              <a:rPr lang="zh-CN" dirty="0"/>
-              <a:t/>
-            </a:r>
-          </a:p>
-          <a:p>
-            <a:r>
-              <a:rPr lang="zh-CN" dirty="0"/>
-              <a:t>课后作业：</a:t>
-            </a:r>
-          </a:p>
-          <a:p>
-            <a:r>
-              <a:rPr lang="zh-CN" dirty="0"/>
-              <a:t>· 完成动手练习 10-1 ~ 10-2</a:t>
-            </a:r>
-          </a:p>
-          <a:p>
-            <a:r>
-              <a:rPr lang="zh-CN" dirty="0"/>
-              <a:t/>
-            </a:r>
-          </a:p>
-          <a:p>
-            <a:r>
-              <a:rPr lang="zh-CN" dirty="0"/>
-              <a:t>节奏：讲 20 分钟 → 学员自己敲 40 分钟（不看答案）→ 对讲评自查 20 分钟 → 写作业 10 分钟。</a:t>
-            </a:r>
-          </a:p>
-        </p:txBody>
-      </p:sp>
-      <p:sp>
-        <p:nvSpPr>
-          <p:cNvPr id="2" name="讲课提示"/>
-          <p:cNvSpPr txBox="1"/>
-          <p:nvPr/>
-        </p:nvSpPr>
-        <p:spPr>
-          <a:xfrm>
-            <a:off x="457200" y="457200"/>
-            <a:ext cx="6858000" cy="4800600"/>
-          </a:xfrm>
-          <a:prstGeom prst="rect">
-            <a:avLst/>
-          </a:prstGeom>
-        </p:spPr>
-        <p:txBody>
-          <a:bodyPr wrap="square"/>
-          <a:lstStyle/>
-          <a:p>
-            <a:r>
-              <a:rPr lang="zh-CN" dirty="0"/>
-              <a:t>第 52 节 · 为什么需要测试与三条命名规则</a:t>
-            </a:r>
-          </a:p>
-          <a:p>
-            <a:r>
-              <a:rPr lang="zh-CN" dirty="0"/>
-              <a:t>单元 10 · 测试代码 · W12</a:t>
-            </a:r>
-          </a:p>
-          <a:p>
-            <a:r>
-              <a:rPr lang="zh-CN" dirty="0"/>
-              <a:t/>
-            </a:r>
-          </a:p>
-          <a:p>
-            <a:r>
-              <a:rPr lang="zh-CN" dirty="0"/>
-              <a:t>学习目标：理解 Bug 分两种，自动化测试的价值在改代码之前</a:t>
-            </a:r>
-          </a:p>
-          <a:p>
-            <a:r>
-              <a:rPr lang="zh-CN" dirty="0"/>
-              <a:t/>
-            </a:r>
-          </a:p>
-          <a:p>
-            <a:r>
-              <a:rPr lang="zh-CN" dirty="0"/>
-              <a:t>课堂实操（40 分钟，不看答案）：</a:t>
-            </a:r>
-          </a:p>
-          <a:p>
-            <a:r>
-              <a:rPr lang="zh-CN" dirty="0"/>
-              <a:t>· 先故意写一个错函数，看没有测试时能撑多久</a:t>
-            </a:r>
-          </a:p>
-          <a:p>
-            <a:r>
-              <a:rPr lang="zh-CN" dirty="0"/>
-              <a:t>· 把测试函数改成不符合命名规则，看能不能被收集</a:t>
-            </a:r>
-          </a:p>
-          <a:p>
-            <a:r>
-              <a:rPr lang="zh-CN" dirty="0"/>
-              <a:t/>
-            </a:r>
-          </a:p>
-          <a:p>
-            <a:r>
-              <a:rPr lang="zh-CN" dirty="0"/>
-              <a:t>课后作业：</a:t>
-            </a:r>
-          </a:p>
-          <a:p>
-            <a:r>
-              <a:rPr lang="zh-CN" dirty="0"/>
-              <a:t>· 完成动手练习 10-1 ~ 10-2</a:t>
-            </a:r>
-          </a:p>
-          <a:p>
-            <a:r>
-              <a:rPr lang="zh-CN" dirty="0"/>
-              <a:t/>
-            </a:r>
-          </a:p>
-          <a:p>
-            <a:r>
-              <a:rPr lang="zh-CN" dirty="0"/>
-              <a:t>节奏：讲 20 分钟 → 学员自己敲 40 分钟（不看答案）→ 对讲评自查 20 分钟 → 写作业 10 分钟。</a:t>
-            </a:r>
-          </a:p>
-        </p:txBody>
-      </p:sp>
-    </p:spTree>
-  </p:cSld>
-  <p:clrMapOvr>
-    <a:masterClrMapping/>
-  </p:clrMapOvr>
-</p:notes>
-</file>
-
-<file path=ppt/notesSlides/notesSlide3.xml><?xml version="1.0" encoding="utf-8"?>
-<p:notes xmlns:a="http://schemas.openxmlformats.org/drawingml/2006/main" xmlns:p="http://schemas.openxmlformats.org/presentationml/2006/main" xmlns:r="http://schemas.openxmlformats.org/officeDocument/2006/relationships">
-  <p:cSld>
-    <p:spTree>
-      <p:nvGrpSpPr>
-        <p:cNvPr id="1" name=""/>
-        <p:cNvGrpSpPr/>
-        <p:nvPr/>
-      </p:nvGrpSpPr>
-      <p:grpSpPr>
-        <a:xfrm>
-          <a:off x="0" y="0"/>
-          <a:ext cx="0" cy="0"/>
-          <a:chOff x="0" y="0"/>
-          <a:chExt cx="0" cy="0"/>
-        </a:xfrm>
-      </p:grpSpPr>
-      <p:sp>
-        <p:nvSpPr>
-          <p:cNvPr id="2" name="讲课提示"/>
-          <p:cNvSpPr txBox="1"/>
-          <p:nvPr/>
-        </p:nvSpPr>
-        <p:spPr>
-          <a:xfrm>
-            <a:off x="457200" y="457200"/>
-            <a:ext cx="6858000" cy="4800600"/>
-          </a:xfrm>
-          <a:prstGeom prst="rect">
-            <a:avLst/>
-          </a:prstGeom>
-        </p:spPr>
-        <p:txBody>
-          <a:bodyPr wrap="square"/>
-          <a:lstStyle/>
-          <a:p>
-            <a:r>
-              <a:rPr lang="zh-CN" dirty="0"/>
-              <a:t>第 52 节 · 核心知识点：为什么需要测试与三条命名规则</a:t>
-            </a:r>
-          </a:p>
-          <a:p>
-            <a:r>
-              <a:rPr lang="zh-CN" dirty="0"/>
-              <a:t/>
-            </a:r>
-          </a:p>
-          <a:p>
-            <a:r>
-              <a:rPr lang="zh-CN" dirty="0"/>
-              <a:t>讲这一页时：先让学生说出上节课的结论，再逐块讲要点。</a:t>
-            </a:r>
-          </a:p>
-          <a:p>
-            <a:r>
-              <a:rPr lang="zh-CN" dirty="0"/>
-              <a:t>每讲完一块，问一句「这一步如果写错了，报错会长什么样？」——把错误提前讲。</a:t>
-            </a:r>
-          </a:p>
-          <a:p>
-            <a:r>
-              <a:rPr lang="zh-CN" dirty="0"/>
-              <a:t/>
-            </a:r>
-          </a:p>
-          <a:p>
-            <a:r>
-              <a:rPr lang="zh-CN" dirty="0"/>
-              <a:t>本节目标：理解 Bug 分两种，自动化测试的价值在改代码之前</a:t>
-            </a:r>
-          </a:p>
-          <a:p>
-            <a:r>
-              <a:rPr lang="zh-CN" dirty="0"/>
-              <a:t/>
-            </a:r>
-          </a:p>
-          <a:p>
-            <a:r>
-              <a:rPr lang="zh-CN" dirty="0"/>
-              <a:t>看不到懂的地方，回讲义对应小节读一遍，再回来对着这页复述一次——能讲出来才算真懂。</a:t>
-            </a:r>
-          </a:p>
-        </p:txBody>
-      </p:sp>
-      <p:sp>
-        <p:nvSpPr>
-          <p:cNvPr id="2" name="讲课提示"/>
-          <p:cNvSpPr txBox="1"/>
-          <p:nvPr/>
-        </p:nvSpPr>
-        <p:spPr>
-          <a:xfrm>
-            <a:off x="457200" y="457200"/>
-            <a:ext cx="6858000" cy="4800600"/>
-          </a:xfrm>
-          <a:prstGeom prst="rect">
-            <a:avLst/>
-          </a:prstGeom>
-        </p:spPr>
-        <p:txBody>
-          <a:bodyPr wrap="square"/>
-          <a:lstStyle/>
-          <a:p>
-            <a:r>
-              <a:rPr lang="zh-CN" dirty="0"/>
-              <a:t>第 52 节 · 核心知识点：为什么需要测试与三条命名规则</a:t>
-            </a:r>
-          </a:p>
-          <a:p>
-            <a:r>
-              <a:rPr lang="zh-CN" dirty="0"/>
-              <a:t/>
-            </a:r>
-          </a:p>
-          <a:p>
-            <a:r>
-              <a:rPr lang="zh-CN" dirty="0"/>
-              <a:t>讲这一页时：先让学生说出上节课的结论，再逐块讲要点。</a:t>
-            </a:r>
-          </a:p>
-          <a:p>
-            <a:r>
-              <a:rPr lang="zh-CN" dirty="0"/>
-              <a:t>每讲完一块，问一句「这一步如果写错了，报错会长什么样？」——把错误提前讲。</a:t>
-            </a:r>
-          </a:p>
-          <a:p>
-            <a:r>
-              <a:rPr lang="zh-CN" dirty="0"/>
-              <a:t/>
-            </a:r>
-          </a:p>
-          <a:p>
-            <a:r>
-              <a:rPr lang="zh-CN" dirty="0"/>
-              <a:t>本节目标：理解 Bug 分两种，自动化测试的价值在改代码之前</a:t>
-            </a:r>
-          </a:p>
-          <a:p>
-            <a:r>
-              <a:rPr lang="zh-CN" dirty="0"/>
-              <a:t/>
-            </a:r>
-          </a:p>
-          <a:p>
-            <a:r>
-              <a:rPr lang="zh-CN" dirty="0"/>
-              <a:t>看不到懂的地方，回讲义对应小节读一遍，再回来对着这页复述一次——能讲出来才算真懂。</a:t>
-            </a:r>
-          </a:p>
-        </p:txBody>
-      </p:sp>
-    </p:spTree>
-  </p:cSld>
-  <p:clrMapOvr>
-    <a:masterClrMapping/>
-  </p:clrMapOvr>
-</p:notes>
-</file>
-
-<file path=ppt/notesSlides/notesSlide4.xml><?xml version="1.0" encoding="utf-8"?>
-<p:notes xmlns:a="http://schemas.openxmlformats.org/drawingml/2006/main" xmlns:p="http://schemas.openxmlformats.org/presentationml/2006/main" xmlns:r="http://schemas.openxmlformats.org/officeDocument/2006/relationships">
-  <p:cSld>
-    <p:spTree>
-      <p:nvGrpSpPr>
-        <p:cNvPr id="1" name=""/>
-        <p:cNvGrpSpPr/>
-        <p:nvPr/>
-      </p:nvGrpSpPr>
-      <p:grpSpPr>
-        <a:xfrm>
-          <a:off x="0" y="0"/>
-          <a:ext cx="0" cy="0"/>
-          <a:chOff x="0" y="0"/>
-          <a:chExt cx="0" cy="0"/>
-        </a:xfrm>
-      </p:grpSpPr>
-      <p:sp>
-        <p:nvSpPr>
-          <p:cNvPr id="2" name="讲课提示"/>
-          <p:cNvSpPr txBox="1"/>
-          <p:nvPr/>
-        </p:nvSpPr>
-        <p:spPr>
-          <a:xfrm>
-            <a:off x="457200" y="457200"/>
-            <a:ext cx="6858000" cy="4800600"/>
-          </a:xfrm>
-          <a:prstGeom prst="rect">
-            <a:avLst/>
-          </a:prstGeom>
-        </p:spPr>
-        <p:txBody>
-          <a:bodyPr wrap="square"/>
-          <a:lstStyle/>
-          <a:p>
-            <a:r>
-              <a:rPr lang="zh-CN" dirty="0"/>
-              <a:t>第 53 节 · assert 与测试用例设计</a:t>
-            </a:r>
-          </a:p>
-          <a:p>
-            <a:r>
-              <a:rPr lang="zh-CN" dirty="0"/>
-              <a:t>单元 10 · 测试代码 · W12</a:t>
-            </a:r>
-          </a:p>
-          <a:p>
-            <a:r>
-              <a:rPr lang="zh-CN" dirty="0"/>
-              <a:t/>
-            </a:r>
-          </a:p>
-          <a:p>
-            <a:r>
-              <a:rPr lang="zh-CN" dirty="0"/>
-              <a:t>学习目标：会用 assert 描述「应该是什么」，掌握正常 + 边界两种用例</a:t>
-            </a:r>
-          </a:p>
-          <a:p>
-            <a:r>
-              <a:rPr lang="zh-CN" dirty="0"/>
-              <a:t/>
-            </a:r>
-          </a:p>
-          <a:p>
-            <a:r>
-              <a:rPr lang="zh-CN" dirty="0"/>
-              <a:t>课堂实操（40 分钟，不看答案）：</a:t>
-            </a:r>
-          </a:p>
-          <a:p>
-            <a:r>
-              <a:rPr lang="zh-CN" dirty="0"/>
-              <a:t>· 给一个函数写 3 条测试：正常 / 边界 / 异常</a:t>
-            </a:r>
-          </a:p>
-          <a:p>
-            <a:r>
-              <a:rPr lang="zh-CN" dirty="0"/>
-              <a:t>· 故意让一条测试失败并读懂报告</a:t>
-            </a:r>
-          </a:p>
-          <a:p>
-            <a:r>
-              <a:rPr lang="zh-CN" dirty="0"/>
-              <a:t/>
-            </a:r>
-          </a:p>
-          <a:p>
-            <a:r>
-              <a:rPr lang="zh-CN" dirty="0"/>
-              <a:t>课后作业：</a:t>
-            </a:r>
-          </a:p>
-          <a:p>
-            <a:r>
-              <a:rPr lang="zh-CN" dirty="0"/>
-              <a:t>· 完成动手练习 10-3 ~ 10-5</a:t>
-            </a:r>
-          </a:p>
-          <a:p>
-            <a:r>
-              <a:rPr lang="zh-CN" dirty="0"/>
-              <a:t/>
-            </a:r>
-          </a:p>
-          <a:p>
-            <a:r>
-              <a:rPr lang="zh-CN" dirty="0"/>
-              <a:t>节奏：讲 20 分钟 → 学员自己敲 40 分钟（不看答案）→ 对讲评自查 20 分钟 → 写作业 10 分钟。</a:t>
-            </a:r>
-          </a:p>
-        </p:txBody>
-      </p:sp>
-      <p:sp>
-        <p:nvSpPr>
-          <p:cNvPr id="2" name="讲课提示"/>
-          <p:cNvSpPr txBox="1"/>
-          <p:nvPr/>
-        </p:nvSpPr>
-        <p:spPr>
-          <a:xfrm>
-            <a:off x="457200" y="457200"/>
-            <a:ext cx="6858000" cy="4800600"/>
-          </a:xfrm>
-          <a:prstGeom prst="rect">
-            <a:avLst/>
-          </a:prstGeom>
-        </p:spPr>
-        <p:txBody>
-          <a:bodyPr wrap="square"/>
-          <a:lstStyle/>
-          <a:p>
-            <a:r>
-              <a:rPr lang="zh-CN" dirty="0"/>
-              <a:t>第 53 节 · assert 与测试用例设计</a:t>
-            </a:r>
-          </a:p>
-          <a:p>
-            <a:r>
-              <a:rPr lang="zh-CN" dirty="0"/>
-              <a:t>单元 10 · 测试代码 · W12</a:t>
-            </a:r>
-          </a:p>
-          <a:p>
-            <a:r>
-              <a:rPr lang="zh-CN" dirty="0"/>
-              <a:t/>
-            </a:r>
-          </a:p>
-          <a:p>
-            <a:r>
-              <a:rPr lang="zh-CN" dirty="0"/>
-              <a:t>学习目标：会用 assert 描述「应该是什么」，掌握正常 + 边界两种用例</a:t>
-            </a:r>
-          </a:p>
-          <a:p>
-            <a:r>
-              <a:rPr lang="zh-CN" dirty="0"/>
-              <a:t/>
-            </a:r>
-          </a:p>
-          <a:p>
-            <a:r>
-              <a:rPr lang="zh-CN" dirty="0"/>
-              <a:t>课堂实操（40 分钟，不看答案）：</a:t>
-            </a:r>
-          </a:p>
-          <a:p>
-            <a:r>
-              <a:rPr lang="zh-CN" dirty="0"/>
-              <a:t>· 给一个函数写 3 条测试：正常 / 边界 / 异常</a:t>
-            </a:r>
-          </a:p>
-          <a:p>
-            <a:r>
-              <a:rPr lang="zh-CN" dirty="0"/>
-              <a:t>· 故意让一条测试失败并读懂报告</a:t>
-            </a:r>
-          </a:p>
-          <a:p>
-            <a:r>
-              <a:rPr lang="zh-CN" dirty="0"/>
-              <a:t/>
-            </a:r>
-          </a:p>
-          <a:p>
-            <a:r>
-              <a:rPr lang="zh-CN" dirty="0"/>
-              <a:t>课后作业：</a:t>
-            </a:r>
-          </a:p>
-          <a:p>
-            <a:r>
-              <a:rPr lang="zh-CN" dirty="0"/>
-              <a:t>· 完成动手练习 10-3 ~ 10-5</a:t>
-            </a:r>
-          </a:p>
-          <a:p>
-            <a:r>
-              <a:rPr lang="zh-CN" dirty="0"/>
-              <a:t/>
-            </a:r>
-          </a:p>
-          <a:p>
-            <a:r>
-              <a:rPr lang="zh-CN" dirty="0"/>
-              <a:t>节奏：讲 20 分钟 → 学员自己敲 40 分钟（不看答案）→ 对讲评自查 20 分钟 → 写作业 10 分钟。</a:t>
-            </a:r>
-          </a:p>
-        </p:txBody>
-      </p:sp>
-    </p:spTree>
-  </p:cSld>
-  <p:clrMapOvr>
-    <a:masterClrMapping/>
-  </p:clrMapOvr>
-</p:notes>
-</file>
-
-<file path=ppt/notesSlides/notesSlide5.xml><?xml version="1.0" encoding="utf-8"?>
-<p:notes xmlns:a="http://schemas.openxmlformats.org/drawingml/2006/main" xmlns:p="http://schemas.openxmlformats.org/presentationml/2006/main" xmlns:r="http://schemas.openxmlformats.org/officeDocument/2006/relationships">
-  <p:cSld>
-    <p:spTree>
-      <p:nvGrpSpPr>
-        <p:cNvPr id="1" name=""/>
-        <p:cNvGrpSpPr/>
-        <p:nvPr/>
-      </p:nvGrpSpPr>
-      <p:grpSpPr>
-        <a:xfrm>
-          <a:off x="0" y="0"/>
-          <a:ext cx="0" cy="0"/>
-          <a:chOff x="0" y="0"/>
-          <a:chExt cx="0" cy="0"/>
-        </a:xfrm>
-      </p:grpSpPr>
-      <p:sp>
-        <p:nvSpPr>
-          <p:cNvPr id="2" name="讲课提示"/>
-          <p:cNvSpPr txBox="1"/>
-          <p:nvPr/>
-        </p:nvSpPr>
-        <p:spPr>
-          <a:xfrm>
-            <a:off x="457200" y="457200"/>
-            <a:ext cx="6858000" cy="4800600"/>
-          </a:xfrm>
-          <a:prstGeom prst="rect">
-            <a:avLst/>
-          </a:prstGeom>
-        </p:spPr>
-        <p:txBody>
-          <a:bodyPr wrap="square"/>
-          <a:lstStyle/>
-          <a:p>
-            <a:r>
-              <a:rPr lang="zh-CN" dirty="0"/>
-              <a:t>第 53 节 · 核心知识点：assert 与测试用例设计</a:t>
-            </a:r>
-          </a:p>
-          <a:p>
-            <a:r>
-              <a:rPr lang="zh-CN" dirty="0"/>
-              <a:t/>
-            </a:r>
-          </a:p>
-          <a:p>
-            <a:r>
-              <a:rPr lang="zh-CN" dirty="0"/>
-              <a:t>讲这一页时：先让学生说出上节课的结论，再逐块讲要点。</a:t>
-            </a:r>
-          </a:p>
-          <a:p>
-            <a:r>
-              <a:rPr lang="zh-CN" dirty="0"/>
-              <a:t>每讲完一块，问一句「这一步如果写错了，报错会长什么样？」——把错误提前讲。</a:t>
-            </a:r>
-          </a:p>
-          <a:p>
-            <a:r>
-              <a:rPr lang="zh-CN" dirty="0"/>
-              <a:t/>
-            </a:r>
-          </a:p>
-          <a:p>
-            <a:r>
-              <a:rPr lang="zh-CN" dirty="0"/>
-              <a:t>本节目标：会用 assert 描述「应该是什么」，掌握正常 + 边界两种用例</a:t>
-            </a:r>
-          </a:p>
-          <a:p>
-            <a:r>
-              <a:rPr lang="zh-CN" dirty="0"/>
-              <a:t/>
-            </a:r>
-          </a:p>
-          <a:p>
-            <a:r>
-              <a:rPr lang="zh-CN" dirty="0"/>
-              <a:t>看不到懂的地方，回讲义对应小节读一遍，再回来对着这页复述一次——能讲出来才算真懂。</a:t>
-            </a:r>
-          </a:p>
-        </p:txBody>
-      </p:sp>
-      <p:sp>
-        <p:nvSpPr>
-          <p:cNvPr id="2" name="讲课提示"/>
-          <p:cNvSpPr txBox="1"/>
-          <p:nvPr/>
-        </p:nvSpPr>
-        <p:spPr>
-          <a:xfrm>
-            <a:off x="457200" y="457200"/>
-            <a:ext cx="6858000" cy="4800600"/>
-          </a:xfrm>
-          <a:prstGeom prst="rect">
-            <a:avLst/>
-          </a:prstGeom>
-        </p:spPr>
-        <p:txBody>
-          <a:bodyPr wrap="square"/>
-          <a:lstStyle/>
-          <a:p>
-            <a:r>
-              <a:rPr lang="zh-CN" dirty="0"/>
-              <a:t>第 53 节 · 核心知识点：assert 与测试用例设计</a:t>
-            </a:r>
-          </a:p>
-          <a:p>
-            <a:r>
-              <a:rPr lang="zh-CN" dirty="0"/>
-              <a:t/>
-            </a:r>
-          </a:p>
-          <a:p>
-            <a:r>
-              <a:rPr lang="zh-CN" dirty="0"/>
-              <a:t>讲这一页时：先让学生说出上节课的结论，再逐块讲要点。</a:t>
-            </a:r>
-          </a:p>
-          <a:p>
-            <a:r>
-              <a:rPr lang="zh-CN" dirty="0"/>
-              <a:t>每讲完一块，问一句「这一步如果写错了，报错会长什么样？」——把错误提前讲。</a:t>
-            </a:r>
-          </a:p>
-          <a:p>
-            <a:r>
-              <a:rPr lang="zh-CN" dirty="0"/>
-              <a:t/>
-            </a:r>
-          </a:p>
-          <a:p>
-            <a:r>
-              <a:rPr lang="zh-CN" dirty="0"/>
-              <a:t>本节目标：会用 assert 描述「应该是什么」，掌握正常 + 边界两种用例</a:t>
-            </a:r>
-          </a:p>
-          <a:p>
-            <a:r>
-              <a:rPr lang="zh-CN" dirty="0"/>
-              <a:t/>
-            </a:r>
-          </a:p>
-          <a:p>
-            <a:r>
-              <a:rPr lang="zh-CN" dirty="0"/>
-              <a:t>看不到懂的地方，回讲义对应小节读一遍，再回来对着这页复述一次——能讲出来才算真懂。</a:t>
-            </a:r>
-          </a:p>
-        </p:txBody>
-      </p:sp>
-    </p:spTree>
-  </p:cSld>
-  <p:clrMapOvr>
-    <a:masterClrMapping/>
-  </p:clrMapOvr>
-</p:notes>
-</file>
-
-<file path=ppt/notesSlides/notesSlide6.xml><?xml version="1.0" encoding="utf-8"?>
-<p:notes xmlns:a="http://schemas.openxmlformats.org/drawingml/2006/main" xmlns:p="http://schemas.openxmlformats.org/presentationml/2006/main" xmlns:r="http://schemas.openxmlformats.org/officeDocument/2006/relationships">
-  <p:cSld>
-    <p:spTree>
-      <p:nvGrpSpPr>
-        <p:cNvPr id="1" name=""/>
-        <p:cNvGrpSpPr/>
-        <p:nvPr/>
-      </p:nvGrpSpPr>
-      <p:grpSpPr>
-        <a:xfrm>
-          <a:off x="0" y="0"/>
-          <a:ext cx="0" cy="0"/>
-          <a:chOff x="0" y="0"/>
-          <a:chExt cx="0" cy="0"/>
-        </a:xfrm>
-      </p:grpSpPr>
-      <p:sp>
-        <p:nvSpPr>
-          <p:cNvPr id="2" name="讲课提示"/>
-          <p:cNvSpPr txBox="1"/>
-          <p:nvPr/>
-        </p:nvSpPr>
-        <p:spPr>
-          <a:xfrm>
-            <a:off x="457200" y="457200"/>
-            <a:ext cx="6858000" cy="4800600"/>
-          </a:xfrm>
-          <a:prstGeom prst="rect">
-            <a:avLst/>
-          </a:prstGeom>
-        </p:spPr>
-        <p:txBody>
-          <a:bodyPr wrap="square"/>
-          <a:lstStyle/>
-          <a:p>
-            <a:r>
-              <a:rPr lang="zh-CN" dirty="0"/>
-              <a:t>第 54 节 · parametrize、测试类与运行命令</a:t>
-            </a:r>
-          </a:p>
-          <a:p>
-            <a:r>
-              <a:rPr lang="zh-CN" dirty="0"/>
-              <a:t>单元 10 · 测试代码 · W12</a:t>
-            </a:r>
-          </a:p>
-          <a:p>
-            <a:r>
-              <a:rPr lang="zh-CN" dirty="0"/>
-              <a:t/>
-            </a:r>
-          </a:p>
-          <a:p>
-            <a:r>
-              <a:rPr lang="zh-CN" dirty="0"/>
-              <a:t>学习目标：会用 parametrize 一次测多组数据，掌握测试类与常用命令</a:t>
-            </a:r>
-          </a:p>
-          <a:p>
-            <a:r>
-              <a:rPr lang="zh-CN" dirty="0"/>
-              <a:t/>
-            </a:r>
-          </a:p>
-          <a:p>
-            <a:r>
-              <a:rPr lang="zh-CN" dirty="0"/>
-              <a:t>课堂实操（40 分钟，不看答案）：</a:t>
-            </a:r>
-          </a:p>
-          <a:p>
-            <a:r>
-              <a:rPr lang="zh-CN" dirty="0"/>
-              <a:t>· 把 5 条相似测试合并成一条 parametrize</a:t>
-            </a:r>
-          </a:p>
-          <a:p>
-            <a:r>
-              <a:rPr lang="zh-CN" dirty="0"/>
-              <a:t>· 跑一次完整 pytest 并读懂输出</a:t>
-            </a:r>
-          </a:p>
-          <a:p>
-            <a:r>
-              <a:rPr lang="zh-CN" dirty="0"/>
-              <a:t/>
-            </a:r>
-          </a:p>
-          <a:p>
-            <a:r>
-              <a:rPr lang="zh-CN" dirty="0"/>
-              <a:t>课后作业：</a:t>
-            </a:r>
-          </a:p>
-          <a:p>
-            <a:r>
-              <a:rPr lang="zh-CN" dirty="0"/>
-              <a:t>· 完成动手练习 10-6 ~ 10-8</a:t>
-            </a:r>
-          </a:p>
-          <a:p>
-            <a:r>
-              <a:rPr lang="zh-CN" dirty="0"/>
-              <a:t/>
-            </a:r>
-          </a:p>
-          <a:p>
-            <a:r>
-              <a:rPr lang="zh-CN" dirty="0"/>
-              <a:t>节奏：讲 20 分钟 → 学员自己敲 40 分钟（不看答案）→ 对讲评自查 20 分钟 → 写作业 10 分钟。</a:t>
-            </a:r>
-          </a:p>
-        </p:txBody>
-      </p:sp>
-      <p:sp>
-        <p:nvSpPr>
-          <p:cNvPr id="2" name="讲课提示"/>
-          <p:cNvSpPr txBox="1"/>
-          <p:nvPr/>
-        </p:nvSpPr>
-        <p:spPr>
-          <a:xfrm>
-            <a:off x="457200" y="457200"/>
-            <a:ext cx="6858000" cy="4800600"/>
-          </a:xfrm>
-          <a:prstGeom prst="rect">
-            <a:avLst/>
-          </a:prstGeom>
-        </p:spPr>
-        <p:txBody>
-          <a:bodyPr wrap="square"/>
-          <a:lstStyle/>
-          <a:p>
-            <a:r>
-              <a:rPr lang="zh-CN" dirty="0"/>
-              <a:t>第 54 节 · parametrize、测试类与运行命令</a:t>
-            </a:r>
-          </a:p>
-          <a:p>
-            <a:r>
-              <a:rPr lang="zh-CN" dirty="0"/>
-              <a:t>单元 10 · 测试代码 · W12</a:t>
-            </a:r>
-          </a:p>
-          <a:p>
-            <a:r>
-              <a:rPr lang="zh-CN" dirty="0"/>
-              <a:t/>
-            </a:r>
-          </a:p>
-          <a:p>
-            <a:r>
-              <a:rPr lang="zh-CN" dirty="0"/>
-              <a:t>学习目标：会用 parametrize 一次测多组数据，掌握测试类与常用命令</a:t>
-            </a:r>
-          </a:p>
-          <a:p>
-            <a:r>
-              <a:rPr lang="zh-CN" dirty="0"/>
-              <a:t/>
-            </a:r>
-          </a:p>
-          <a:p>
-            <a:r>
-              <a:rPr lang="zh-CN" dirty="0"/>
-              <a:t>课堂实操（40 分钟，不看答案）：</a:t>
-            </a:r>
-          </a:p>
-          <a:p>
-            <a:r>
-              <a:rPr lang="zh-CN" dirty="0"/>
-              <a:t>· 把 5 条相似测试合并成一条 parametrize</a:t>
-            </a:r>
-          </a:p>
-          <a:p>
-            <a:r>
-              <a:rPr lang="zh-CN" dirty="0"/>
-              <a:t>· 跑一次完整 pytest 并读懂输出</a:t>
-            </a:r>
-          </a:p>
-          <a:p>
-            <a:r>
-              <a:rPr lang="zh-CN" dirty="0"/>
-              <a:t/>
-            </a:r>
-          </a:p>
-          <a:p>
-            <a:r>
-              <a:rPr lang="zh-CN" dirty="0"/>
-              <a:t>课后作业：</a:t>
-            </a:r>
-          </a:p>
-          <a:p>
-            <a:r>
-              <a:rPr lang="zh-CN" dirty="0"/>
-              <a:t>· 完成动手练习 10-6 ~ 10-8</a:t>
-            </a:r>
-          </a:p>
-          <a:p>
-            <a:r>
-              <a:rPr lang="zh-CN" dirty="0"/>
-              <a:t/>
-            </a:r>
-          </a:p>
-          <a:p>
-            <a:r>
-              <a:rPr lang="zh-CN" dirty="0"/>
-              <a:t>节奏：讲 20 分钟 → 学员自己敲 40 分钟（不看答案）→ 对讲评自查 20 分钟 → 写作业 10 分钟。</a:t>
-            </a:r>
-          </a:p>
-        </p:txBody>
-      </p:sp>
-    </p:spTree>
-  </p:cSld>
-  <p:clrMapOvr>
-    <a:masterClrMapping/>
-  </p:clrMapOvr>
-</p:notes>
-</file>
-
-<file path=ppt/notesSlides/notesSlide7.xml><?xml version="1.0" encoding="utf-8"?>
-<p:notes xmlns:a="http://schemas.openxmlformats.org/drawingml/2006/main" xmlns:p="http://schemas.openxmlformats.org/presentationml/2006/main" xmlns:r="http://schemas.openxmlformats.org/officeDocument/2006/relationships">
-  <p:cSld>
-    <p:spTree>
-      <p:nvGrpSpPr>
-        <p:cNvPr id="1" name=""/>
-        <p:cNvGrpSpPr/>
-        <p:nvPr/>
-      </p:nvGrpSpPr>
-      <p:grpSpPr>
-        <a:xfrm>
-          <a:off x="0" y="0"/>
-          <a:ext cx="0" cy="0"/>
-          <a:chOff x="0" y="0"/>
-          <a:chExt cx="0" cy="0"/>
-        </a:xfrm>
-      </p:grpSpPr>
-      <p:sp>
-        <p:nvSpPr>
-          <p:cNvPr id="2" name="讲课提示"/>
-          <p:cNvSpPr txBox="1"/>
-          <p:nvPr/>
-        </p:nvSpPr>
-        <p:spPr>
-          <a:xfrm>
-            <a:off x="457200" y="457200"/>
-            <a:ext cx="6858000" cy="4800600"/>
-          </a:xfrm>
-          <a:prstGeom prst="rect">
-            <a:avLst/>
-          </a:prstGeom>
-        </p:spPr>
-        <p:txBody>
-          <a:bodyPr wrap="square"/>
-          <a:lstStyle/>
-          <a:p>
-            <a:r>
-              <a:rPr lang="zh-CN" dirty="0"/>
-              <a:t>第 54 节 · 核心知识点：parametrize、测试类与运行命令</a:t>
-            </a:r>
-          </a:p>
-          <a:p>
-            <a:r>
-              <a:rPr lang="zh-CN" dirty="0"/>
-              <a:t/>
-            </a:r>
-          </a:p>
-          <a:p>
-            <a:r>
-              <a:rPr lang="zh-CN" dirty="0"/>
-              <a:t>讲这一页时：先让学生说出上节课的结论，再逐块讲要点。</a:t>
-            </a:r>
-          </a:p>
-          <a:p>
-            <a:r>
-              <a:rPr lang="zh-CN" dirty="0"/>
-              <a:t>每讲完一块，问一句「这一步如果写错了，报错会长什么样？」——把错误提前讲。</a:t>
-            </a:r>
-          </a:p>
-          <a:p>
-            <a:r>
-              <a:rPr lang="zh-CN" dirty="0"/>
-              <a:t/>
-            </a:r>
-          </a:p>
-          <a:p>
-            <a:r>
-              <a:rPr lang="zh-CN" dirty="0"/>
-              <a:t>本节目标：会用 parametrize 一次测多组数据，掌握测试类与常用命令</a:t>
-            </a:r>
-          </a:p>
-          <a:p>
-            <a:r>
-              <a:rPr lang="zh-CN" dirty="0"/>
-              <a:t/>
-            </a:r>
-          </a:p>
-          <a:p>
-            <a:r>
-              <a:rPr lang="zh-CN" dirty="0"/>
-              <a:t>看不到懂的地方，回讲义对应小节读一遍，再回来对着这页复述一次——能讲出来才算真懂。</a:t>
-            </a:r>
-          </a:p>
-        </p:txBody>
-      </p:sp>
-      <p:sp>
-        <p:nvSpPr>
-          <p:cNvPr id="2" name="讲课提示"/>
-          <p:cNvSpPr txBox="1"/>
-          <p:nvPr/>
-        </p:nvSpPr>
-        <p:spPr>
-          <a:xfrm>
-            <a:off x="457200" y="457200"/>
-            <a:ext cx="6858000" cy="4800600"/>
-          </a:xfrm>
-          <a:prstGeom prst="rect">
-            <a:avLst/>
-          </a:prstGeom>
-        </p:spPr>
-        <p:txBody>
-          <a:bodyPr wrap="square"/>
-          <a:lstStyle/>
-          <a:p>
-            <a:r>
-              <a:rPr lang="zh-CN" dirty="0"/>
-              <a:t>第 54 节 · 核心知识点：parametrize、测试类与运行命令</a:t>
-            </a:r>
-          </a:p>
-          <a:p>
-            <a:r>
-              <a:rPr lang="zh-CN" dirty="0"/>
-              <a:t/>
-            </a:r>
-          </a:p>
-          <a:p>
-            <a:r>
-              <a:rPr lang="zh-CN" dirty="0"/>
-              <a:t>讲这一页时：先让学生说出上节课的结论，再逐块讲要点。</a:t>
-            </a:r>
-          </a:p>
-          <a:p>
-            <a:r>
-              <a:rPr lang="zh-CN" dirty="0"/>
-              <a:t>每讲完一块，问一句「这一步如果写错了，报错会长什么样？」——把错误提前讲。</a:t>
-            </a:r>
-          </a:p>
-          <a:p>
-            <a:r>
-              <a:rPr lang="zh-CN" dirty="0"/>
-              <a:t/>
-            </a:r>
-          </a:p>
-          <a:p>
-            <a:r>
-              <a:rPr lang="zh-CN" dirty="0"/>
-              <a:t>本节目标：会用 parametrize 一次测多组数据，掌握测试类与常用命令</a:t>
-            </a:r>
-          </a:p>
-          <a:p>
-            <a:r>
-              <a:rPr lang="zh-CN" dirty="0"/>
-              <a:t/>
-            </a:r>
-          </a:p>
-          <a:p>
-            <a:r>
-              <a:rPr lang="zh-CN" dirty="0"/>
-              <a:t>看不到懂的地方，回讲义对应小节读一遍，再回来对着这页复述一次——能讲出来才算真懂。</a:t>
-            </a:r>
-          </a:p>
-        </p:txBody>
-      </p:sp>
-    </p:spTree>
-  </p:cSld>
-  <p:clrMapOvr>
-    <a:masterClrMapping/>
-  </p:clrMapOvr>
-</p:notes>
-</file>
-
-<file path=ppt/notesSlides/notesSlide8.xml><?xml version="1.0" encoding="utf-8"?>
-<p:notes xmlns:a="http://schemas.openxmlformats.org/drawingml/2006/main" xmlns:p="http://schemas.openxmlformats.org/presentationml/2006/main" xmlns:r="http://schemas.openxmlformats.org/officeDocument/2006/relationships">
-  <p:cSld>
-    <p:spTree>
-      <p:nvGrpSpPr>
-        <p:cNvPr id="1" name=""/>
-        <p:cNvGrpSpPr/>
-        <p:nvPr/>
-      </p:nvGrpSpPr>
-      <p:grpSpPr>
-        <a:xfrm>
-          <a:off x="0" y="0"/>
-          <a:ext cx="0" cy="0"/>
-          <a:chOff x="0" y="0"/>
-          <a:chExt cx="0" cy="0"/>
-        </a:xfrm>
-      </p:grpSpPr>
-      <p:sp>
-        <p:nvSpPr>
-          <p:cNvPr id="2" name="讲课提示"/>
-          <p:cNvSpPr txBox="1"/>
-          <p:nvPr/>
-        </p:nvSpPr>
-        <p:spPr>
-          <a:xfrm>
-            <a:off x="457200" y="457200"/>
-            <a:ext cx="6858000" cy="4800600"/>
-          </a:xfrm>
-          <a:prstGeom prst="rect">
-            <a:avLst/>
-          </a:prstGeom>
-        </p:spPr>
-        <p:txBody>
-          <a:bodyPr wrap="square"/>
-          <a:lstStyle/>
-          <a:p>
-            <a:r>
-              <a:rPr lang="zh-CN" dirty="0"/>
-              <a:t>第 55 节 · 测试夹具与示例串讲</a:t>
-            </a:r>
-          </a:p>
-          <a:p>
-            <a:r>
-              <a:rPr lang="zh-CN" dirty="0"/>
-              <a:t>单元 10 · 测试代码 · W12</a:t>
-            </a:r>
-          </a:p>
-          <a:p>
-            <a:r>
-              <a:rPr lang="zh-CN" dirty="0"/>
-              <a:t/>
-            </a:r>
-          </a:p>
-          <a:p>
-            <a:r>
-              <a:rPr lang="zh-CN" dirty="0"/>
-              <a:t>学习目标：理解夹具解决什么问题，能读懂 pytest 的输出报告</a:t>
-            </a:r>
-          </a:p>
-          <a:p>
-            <a:r>
-              <a:rPr lang="zh-CN" dirty="0"/>
-              <a:t/>
-            </a:r>
-          </a:p>
-          <a:p>
-            <a:r>
-              <a:rPr lang="zh-CN" dirty="0"/>
-              <a:t>课堂实操（40 分钟，不看答案）：</a:t>
-            </a:r>
-          </a:p>
-          <a:p>
-            <a:r>
-              <a:rPr lang="zh-CN" dirty="0"/>
-              <a:t>· 对照示例讲清测试夹具的用途</a:t>
-            </a:r>
-          </a:p>
-          <a:p>
-            <a:r>
-              <a:rPr lang="zh-CN" dirty="0"/>
-              <a:t>· 故意让一个测试类失败并读懂报告</a:t>
-            </a:r>
-          </a:p>
-          <a:p>
-            <a:r>
-              <a:rPr lang="zh-CN" dirty="0"/>
-              <a:t/>
-            </a:r>
-          </a:p>
-          <a:p>
-            <a:r>
-              <a:rPr lang="zh-CN" dirty="0"/>
-              <a:t>课后作业：</a:t>
-            </a:r>
-          </a:p>
-          <a:p>
-            <a:r>
-              <a:rPr lang="zh-CN" dirty="0"/>
-              <a:t>· 给单元 7/8/9 写过的代码补测试（共 8 条以上）</a:t>
-            </a:r>
-          </a:p>
-          <a:p>
-            <a:r>
-              <a:rPr lang="zh-CN" dirty="0"/>
-              <a:t/>
-            </a:r>
-          </a:p>
-          <a:p>
-            <a:r>
-              <a:rPr lang="zh-CN" dirty="0"/>
-              <a:t>节奏：讲 20 分钟 → 学员自己敲 40 分钟（不看答案）→ 对讲评自查 20 分钟 → 写作业 10 分钟。</a:t>
-            </a:r>
-          </a:p>
-        </p:txBody>
-      </p:sp>
-      <p:sp>
-        <p:nvSpPr>
-          <p:cNvPr id="2" name="讲课提示"/>
-          <p:cNvSpPr txBox="1"/>
-          <p:nvPr/>
-        </p:nvSpPr>
-        <p:spPr>
-          <a:xfrm>
-            <a:off x="457200" y="457200"/>
-            <a:ext cx="6858000" cy="4800600"/>
-          </a:xfrm>
-          <a:prstGeom prst="rect">
-            <a:avLst/>
-          </a:prstGeom>
-        </p:spPr>
-        <p:txBody>
-          <a:bodyPr wrap="square"/>
-          <a:lstStyle/>
-          <a:p>
-            <a:r>
-              <a:rPr lang="zh-CN" dirty="0"/>
-              <a:t>第 55 节 · 测试夹具与示例串讲</a:t>
-            </a:r>
-          </a:p>
-          <a:p>
-            <a:r>
-              <a:rPr lang="zh-CN" dirty="0"/>
-              <a:t>单元 10 · 测试代码 · W12</a:t>
-            </a:r>
-          </a:p>
-          <a:p>
-            <a:r>
-              <a:rPr lang="zh-CN" dirty="0"/>
-              <a:t/>
-            </a:r>
-          </a:p>
-          <a:p>
-            <a:r>
-              <a:rPr lang="zh-CN" dirty="0"/>
-              <a:t>学习目标：理解夹具解决什么问题，能读懂 pytest 的输出报告</a:t>
-            </a:r>
-          </a:p>
-          <a:p>
-            <a:r>
-              <a:rPr lang="zh-CN" dirty="0"/>
-              <a:t/>
-            </a:r>
-          </a:p>
-          <a:p>
-            <a:r>
-              <a:rPr lang="zh-CN" dirty="0"/>
-              <a:t>课堂实操（40 分钟，不看答案）：</a:t>
-            </a:r>
-          </a:p>
-          <a:p>
-            <a:r>
-              <a:rPr lang="zh-CN" dirty="0"/>
-              <a:t>· 对照示例讲清测试夹具的用途</a:t>
-            </a:r>
-          </a:p>
-          <a:p>
-            <a:r>
-              <a:rPr lang="zh-CN" dirty="0"/>
-              <a:t>· 故意让一个测试类失败并读懂报告</a:t>
-            </a:r>
-          </a:p>
-          <a:p>
-            <a:r>
-              <a:rPr lang="zh-CN" dirty="0"/>
-              <a:t/>
-            </a:r>
-          </a:p>
-          <a:p>
-            <a:r>
-              <a:rPr lang="zh-CN" dirty="0"/>
-              <a:t>课后作业：</a:t>
-            </a:r>
-          </a:p>
-          <a:p>
-            <a:r>
-              <a:rPr lang="zh-CN" dirty="0"/>
-              <a:t>· 给单元 7/8/9 写过的代码补测试（共 8 条以上）</a:t>
-            </a:r>
-          </a:p>
-          <a:p>
-            <a:r>
-              <a:rPr lang="zh-CN" dirty="0"/>
-              <a:t/>
-            </a:r>
-          </a:p>
-          <a:p>
-            <a:r>
-              <a:rPr lang="zh-CN" dirty="0"/>
-              <a:t>节奏：讲 20 分钟 → 学员自己敲 40 分钟（不看答案）→ 对讲评自查 20 分钟 → 写作业 10 分钟。</a:t>
-            </a:r>
-          </a:p>
-        </p:txBody>
-      </p:sp>
-    </p:spTree>
-  </p:cSld>
-  <p:clrMapOvr>
-    <a:masterClrMapping/>
-  </p:clrMapOvr>
-</p:notes>
-</file>
-
-<file path=ppt/notesSlides/notesSlide9.xml><?xml version="1.0" encoding="utf-8"?>
-<p:notes xmlns:a="http://schemas.openxmlformats.org/drawingml/2006/main" xmlns:p="http://schemas.openxmlformats.org/presentationml/2006/main" xmlns:r="http://schemas.openxmlformats.org/officeDocument/2006/relationships">
-  <p:cSld>
-    <p:spTree>
-      <p:nvGrpSpPr>
-        <p:cNvPr id="1" name=""/>
-        <p:cNvGrpSpPr/>
-        <p:nvPr/>
-      </p:nvGrpSpPr>
-      <p:grpSpPr>
-        <a:xfrm>
-          <a:off x="0" y="0"/>
-          <a:ext cx="0" cy="0"/>
-          <a:chOff x="0" y="0"/>
-          <a:chExt cx="0" cy="0"/>
-        </a:xfrm>
-      </p:grpSpPr>
-      <p:sp>
-        <p:nvSpPr>
-          <p:cNvPr id="2" name="讲课提示"/>
-          <p:cNvSpPr txBox="1"/>
-          <p:nvPr/>
-        </p:nvSpPr>
-        <p:spPr>
-          <a:xfrm>
-            <a:off x="457200" y="457200"/>
-            <a:ext cx="6858000" cy="4800600"/>
-          </a:xfrm>
-          <a:prstGeom prst="rect">
-            <a:avLst/>
-          </a:prstGeom>
-        </p:spPr>
-        <p:txBody>
-          <a:bodyPr wrap="square"/>
-          <a:lstStyle/>
-          <a:p>
-            <a:r>
-              <a:rPr lang="zh-CN" dirty="0"/>
-              <a:t>第 55 节 · 核心知识点：测试夹具与示例串讲</a:t>
-            </a:r>
-          </a:p>
-          <a:p>
-            <a:r>
-              <a:rPr lang="zh-CN" dirty="0"/>
-              <a:t/>
-            </a:r>
-          </a:p>
-          <a:p>
-            <a:r>
-              <a:rPr lang="zh-CN" dirty="0"/>
-              <a:t>讲这一页时：先让学生说出上节课的结论，再逐块讲要点。</a:t>
-            </a:r>
-          </a:p>
-          <a:p>
-            <a:r>
-              <a:rPr lang="zh-CN" dirty="0"/>
-              <a:t>每讲完一块，问一句「这一步如果写错了，报错会长什么样？」——把错误提前讲。</a:t>
-            </a:r>
-          </a:p>
-          <a:p>
-            <a:r>
-              <a:rPr lang="zh-CN" dirty="0"/>
-              <a:t/>
-            </a:r>
-          </a:p>
-          <a:p>
-            <a:r>
-              <a:rPr lang="zh-CN" dirty="0"/>
-              <a:t>本节目标：理解夹具解决什么问题，能读懂 pytest 的输出报告</a:t>
-            </a:r>
-          </a:p>
-          <a:p>
-            <a:r>
-              <a:rPr lang="zh-CN" dirty="0"/>
-              <a:t/>
-            </a:r>
-          </a:p>
-          <a:p>
-            <a:r>
-              <a:rPr lang="zh-CN" dirty="0"/>
-              <a:t>看不到懂的地方，回讲义对应小节读一遍，再回来对着这页复述一次——能讲出来才算真懂。</a:t>
-            </a:r>
-          </a:p>
-        </p:txBody>
-      </p:sp>
-      <p:sp>
-        <p:nvSpPr>
-          <p:cNvPr id="2" name="讲课提示"/>
-          <p:cNvSpPr txBox="1"/>
-          <p:nvPr/>
-        </p:nvSpPr>
-        <p:spPr>
-          <a:xfrm>
-            <a:off x="457200" y="457200"/>
-            <a:ext cx="6858000" cy="4800600"/>
-          </a:xfrm>
-          <a:prstGeom prst="rect">
-            <a:avLst/>
-          </a:prstGeom>
-        </p:spPr>
-        <p:txBody>
-          <a:bodyPr wrap="square"/>
-          <a:lstStyle/>
-          <a:p>
-            <a:r>
-              <a:rPr lang="zh-CN" dirty="0"/>
-              <a:t>第 55 节 · 核心知识点：测试夹具与示例串讲</a:t>
-            </a:r>
-          </a:p>
-          <a:p>
-            <a:r>
-              <a:rPr lang="zh-CN" dirty="0"/>
-              <a:t/>
-            </a:r>
-          </a:p>
-          <a:p>
-            <a:r>
-              <a:rPr lang="zh-CN" dirty="0"/>
-              <a:t>讲这一页时：先让学生说出上节课的结论，再逐块讲要点。</a:t>
-            </a:r>
-          </a:p>
-          <a:p>
-            <a:r>
-              <a:rPr lang="zh-CN" dirty="0"/>
-              <a:t>每讲完一块，问一句「这一步如果写错了，报错会长什么样？」——把错误提前讲。</a:t>
-            </a:r>
-          </a:p>
-          <a:p>
-            <a:r>
-              <a:rPr lang="zh-CN" dirty="0"/>
-              <a:t/>
-            </a:r>
-          </a:p>
-          <a:p>
-            <a:r>
-              <a:rPr lang="zh-CN" dirty="0"/>
-              <a:t>本节目标：理解夹具解决什么问题，能读懂 pytest 的输出报告</a:t>
-            </a:r>
-          </a:p>
-          <a:p>
-            <a:r>
-              <a:rPr lang="zh-CN" dirty="0"/>
-              <a:t/>
-            </a:r>
-          </a:p>
-          <a:p>
-            <a:r>
-              <a:rPr lang="zh-CN" dirty="0"/>
-              <a:t>看不到懂的地方，回讲义对应小节读一遍，再回来对着这页复述一次——能讲出来才算真懂。</a:t>
-            </a:r>
-          </a:p>
-        </p:txBody>
-      </p:sp>
-    </p:spTree>
-  </p:cSld>
-  <p:clrMapOvr>
-    <a:masterClrMapping/>
-  </p:clrMapOvr>
-</p:notes>
-</file>
-
 <file path=ppt/slideLayouts/slideLayout1.xml><?xml version="1.0" encoding="utf-8"?>
 <p:sldLayout xmlns:p="http://schemas.openxmlformats.org/presentationml/2006/main" xmlns:a="http://schemas.openxmlformats.org/drawingml/2006/main">
   <p:cSld name="DEFAULT">
@@ -2787,7 +555,7 @@
   <p:cSld>
     <p:spTree>
       <p:nvGrpSpPr>
-        <p:cNvPr id="1" name="" descr="&lt;Slide style={{ width: '1280px', height: '720px', backgroundColor: '#FAFCFE', padding: 0, position: 'relative', overflow: 'hidden' }}&gt;&#13;&#10;    &lt;Box style={{ position: 'absolute', left: 0, top: 0, width: '1280px', height: '150px', background: '#1F5FA8' }} /&gt;&#13;&#10;    &lt;Box style={{ position: 'absolute', left: 64, top: 34, width: '1152px', flexDirection: 'column' }}&gt;&#13;&#10;        &lt;Text style={{ fontSize: 15, fontWeight: 'bold', color: '#BFD9F2', letterSpacing: 2 }}&gt;阶段 1 · 单元 10&lt;/Text&gt;&#13;&#10;        &lt;Text style={{ fontSize: 38, fontWeight: 'bold', color: '#FFFFFF', marginTop: 6 }}&gt;测试代码&lt;/Text&gt;&#13;&#10;    &lt;/Box&gt;&#13;&#10;    &lt;Box style={{ position: 'absolute', left: 64, top: 168, width: '1152px', height: 470 }}&gt;&#13;&#10;        &lt;svg width='1152' height='470' viewBox='0 0 1152 470'&gt;&#13;&#10;            &lt;text x='0' y='18' fontSize='15' fontWeight='bold' fill='#16232E' fontFamily='Microsoft YaHei'&gt;本单元共 5 节课&lt;/text&gt;&#13;&#10;            &lt;rect x='0' y='196' width='1152' height='38' rx='7' fill='#FFFFFF' /&gt;&lt;text x='16' y='221' fontSize='15' fontWeight='bold' fill='#1F5FA8' fontFamily='Microsoft YaHei'&gt;第 52 节&lt;/text&gt;&lt;text x='96' y='221' fontSize='15' fill='#16232E' fontFamily='Microsoft YaHei'&gt;为什么需要测试与三条命名规则&lt;/text&gt;&lt;text x='1080' y='221' fontSize='13' fill='#5A6B7A' textAnchor='end' fontFamily='Microsoft YaHei'&gt;W12&lt;/text&gt;&lt;rect x='0' y='238' width='1152' height='38' rx='7' fill='#F2F7FD' /&gt;&lt;text x='16' y='263' fontSize='15' fontWeight='bold' fill='#1F5FA8' fontFamily='Microsoft YaHei'&gt;第 53 节&lt;/text&gt;&lt;text x='96' y='263' fontSize='15' fill='#16232E' fontFamily='Microsoft YaHei'&gt;assert 与测试用例设计&lt;/text&gt;&lt;text x='1080' y='263' fontSize='13' fill='#5A6B7A' textAnchor='end' fontFamily='Microsoft YaHei'&gt;W12&lt;/text&gt;&lt;rect x='0' y='280' width='1152' height='38' rx='7' fill='#FFFFFF' /&gt;&lt;text x='16' y='305' fontSize='15' fontWeight='bold' fill='#1F5FA8' fontFamily='Microsoft YaHei'&gt;第 54 节&lt;/text&gt;&lt;text x='96' y='305' fontSize='15' fill='#16232E' fontFamily='Microsoft YaHei'&gt;parametrize、测试类与运行命令&lt;/text&gt;&lt;text x='1080' y='305' fontSize='13' fill='#5A6B7A' textAnchor='end' fontFamily='Microsoft YaHei'&gt;W12&lt;/text&gt;&lt;rect x='0' y='322' width='1152' height='38' rx='7' fill='#F2F7FD' /&gt;&lt;text x='16' y='347' fontSize='15' fontWeight='bold' fill='#1F5FA8' fontFamily='Microsoft YaHei'&gt;第 55 节&lt;/text&gt;&lt;text x='96' y='347' fontSize='15' fill='#16232E' fontFamily='Microsoft YaHei'&gt;测试夹具与示例串讲&lt;/text&gt;&lt;text x='1080' y='347' fontSize='13' fill='#5A6B7A' textAnchor='end' fontFamily='Microsoft YaHei'&gt;W12&lt;/text&gt;&lt;rect x='0' y='364' width='1152' height='38' rx='7' fill='#FFFFFF' /&gt;&lt;text x='16' y='389' fontSize='15' fontWeight='bold' fill='#1F5FA8' fontFamily='Microsoft YaHei'&gt;第 56 节&lt;/text&gt;&lt;text x='96' y='389' fontSize='15' fill='#16232E' fontFamily='Microsoft YaHei'&gt;动手实战、答案与验收&lt;/text&gt;&lt;text x='1080' y='389' fontSize='13' fill='#5A6B7A' textAnchor='end' fontFamily='Microsoft YaHei'&gt;W12&lt;/text&gt;&#13;&#10;        &lt;/svg&gt;&#13;&#10;    &lt;/Box&gt;&#13;&#10;    &lt;Box style={{ position: 'absolute', left: 64, bottom: 22, width: '1152px', flexDirection: 'row', justifyContent: 'space-between' }}&gt;&#13;&#10;        &lt;Text style={{ fontSize: 13, color: '#8A9AAA' }}&gt;Python 讲授课件 · 逐节版&lt;/Text&gt;&#13;&#10;        &lt;Text style={{ fontSize: 13, color: '#8A9AAA' }}&gt;单元 10 · 封面&lt;/Text&gt;&#13;&#10;    &lt;/Box&gt;&#13;&#10;&lt;/Slide&gt;&#13;&#10;"/>
+        <p:cNvPr id="1" name="" descr="&lt;Slide style={{ width: '1280px', height: '720px', backgroundColor: '#FAFCFE', padding: 0, position: 'relative', overflow: 'hidden' }}&gt;&#13;&#10;    &lt;Box style={{ position: 'absolute', left: 0, top: 0, width: '1280px', height: '150px', background: '#1F5FA8' }} /&gt;&#13;&#10;    &lt;Box style={{ position: 'absolute', left: 64, top: 34, width: '1152px', flexDirection: 'column' }}&gt;&#13;&#10;        &lt;Text style={{ fontSize: 15, fontWeight: 'bold', color: '#BFD9F2', letterSpacing: 2 }}&gt;阶段 1 · 单元 10&lt;/Text&gt;&#13;&#10;        &lt;Text style={{ fontSize: 38, fontWeight: 'bold', color: '#FFFFFF', marginTop: 6 }}&gt;测试代码&lt;/Text&gt;&#13;&#10;    &lt;/Box&gt;&#13;&#10;    &lt;Box style={{ position: 'absolute', left: 64, top: 168, width: '1152px', height: 470 }}&gt;&#13;&#10;        &lt;svg width='1152' height='470' viewBox='0 0 1152 470'&gt;&#13;&#10;            &lt;text x='0' y='18' fontSize='15' fontWeight='bold' fill='#16232E' fontFamily='Microsoft YaHei'&gt;本单元共 5 节课&lt;/text&gt;&#13;&#10;            &lt;rect x='0' y='56.0' width='1152' height='48.0' rx='7' fill='#FFFFFF' /&gt;&lt;text x='16' y='85.0' fontSize='15' fontWeight='bold' fill='#1F5FA8' fontFamily='Microsoft YaHei'&gt;第 52 节&lt;/text&gt;&lt;text x='96' y='85.0' fontSize='15' fill='#16232E' fontFamily='Microsoft YaHei'&gt;为什么需要测试与三条命名规则&lt;/text&gt;&lt;text x='1080' y='85.0' fontSize='13' fill='#5A6B7A' textAnchor='end' fontFamily='Microsoft YaHei'&gt;W12&lt;/text&gt;&lt;rect x='0' y='135.2' width='1152' height='48.0' rx='7' fill='#F2F7FD' /&gt;&lt;text x='16' y='164.2' fontSize='15' fontWeight='bold' fill='#1F5FA8' fontFamily='Microsoft YaHei'&gt;第 53 节&lt;/text&gt;&lt;text x='96' y='164.2' fontSize='15' fill='#16232E' fontFamily='Microsoft YaHei'&gt;assert 与测试用例设计&lt;/text&gt;&lt;text x='1080' y='164.2' fontSize='13' fill='#5A6B7A' textAnchor='end' fontFamily='Microsoft YaHei'&gt;W12&lt;/text&gt;&lt;rect x='0' y='214.4' width='1152' height='48.0' rx='7' fill='#FFFFFF' /&gt;&lt;text x='16' y='243.4' fontSize='15' fontWeight='bold' fill='#1F5FA8' fontFamily='Microsoft YaHei'&gt;第 54 节&lt;/text&gt;&lt;text x='96' y='243.4' fontSize='15' fill='#16232E' fontFamily='Microsoft YaHei'&gt;parametrize、测试类与运行命令&lt;/text&gt;&lt;text x='1080' y='243.4' fontSize='13' fill='#5A6B7A' textAnchor='end' fontFamily='Microsoft YaHei'&gt;W12&lt;/text&gt;&lt;rect x='0' y='293.6' width='1152' height='48.0' rx='7' fill='#F2F7FD' /&gt;&lt;text x='16' y='322.6' fontSize='15' fontWeight='bold' fill='#1F5FA8' fontFamily='Microsoft YaHei'&gt;第 55 节&lt;/text&gt;&lt;text x='96' y='322.6' fontSize='15' fill='#16232E' fontFamily='Microsoft YaHei'&gt;测试夹具与示例串讲&lt;/text&gt;&lt;text x='1080' y='322.6' fontSize='13' fill='#5A6B7A' textAnchor='end' fontFamily='Microsoft YaHei'&gt;W12&lt;/text&gt;&lt;rect x='0' y='372.8' width='1152' height='48.0' rx='7' fill='#FFFFFF' /&gt;&lt;text x='16' y='401.8' fontSize='15' fontWeight='bold' fill='#1F5FA8' fontFamily='Microsoft YaHei'&gt;第 56 节&lt;/text&gt;&lt;text x='96' y='401.8' fontSize='15' fill='#16232E' fontFamily='Microsoft YaHei'&gt;动手实战、答案与验收&lt;/text&gt;&lt;text x='1080' y='401.8' fontSize='13' fill='#5A6B7A' textAnchor='end' fontFamily='Microsoft YaHei'&gt;W12&lt;/text&gt;&#13;&#10;        &lt;/svg&gt;&#13;&#10;    &lt;/Box&gt;&#13;&#10;    &lt;Box style={{ position: 'absolute', left: 64, bottom: 22, width: '1152px', flexDirection: 'row', justifyContent: 'space-between' }}&gt;&#13;&#10;        &lt;Text style={{ fontSize: 13, color: '#8A9AAA' }}&gt;Python 讲授课件 · 逐节版&lt;/Text&gt;&#13;&#10;        &lt;Text style={{ fontSize: 13, color: '#8A9AAA' }}&gt;单元 10 · 封面&lt;/Text&gt;&#13;&#10;    &lt;/Box&gt;&#13;&#10;&lt;/Slide&gt;&#13;&#10;"/>
         <p:cNvGrpSpPr/>
         <p:nvPr/>
       </p:nvGrpSpPr>
@@ -3301,7 +1069,7 @@
   <p:cSld>
     <p:spTree>
       <p:nvGrpSpPr>
-        <p:cNvPr id="15" name="" descr="&lt;Slide style={{ width: '1280px', height: '720px', backgroundColor: '#FAFCFE', padding: 0, position: 'relative', overflow: 'hidden' }}&gt;&#13;&#10;    &lt;Box style={{ position: 'absolute', left: 64, top: 36, width: '1152px', flexDirection: 'row', alignItems: 'center', gap: 12 }}&gt;&#13;&#10;        &lt;Box style={{ background: '#0E9B78', borderRadius: 5, padding: '3px 11px' }}&gt;&#13;&#10;            &lt;Text style={{ fontSize: 14, fontWeight: 'bold', color: '#FFFFFF' }}&gt;第 56 节&lt;/Text&gt;&#13;&#10;        &lt;/Box&gt;&#13;&#10;        &lt;Text style={{ fontSize: 30, fontWeight: 'bold', color: '#16232E' }}&gt;核心知识点&lt;/Text&gt;&#13;&#10;        &lt;Text style={{ fontSize: 15, color: '#5A6B7A', marginTop: 10 }}&gt;· 动手实战、答案与验收&lt;/Text&gt;&#13;&#10;    &lt;/Box&gt;&#13;&#10;    &lt;Box style={{ position: 'absolute', left: 0, top: 0, width: '1280px', height: '720px' }}&gt;&#13;&#10;        &lt;svg width='1280' height='720' viewBox='0 0 1280 720'&gt;&#13;&#10;            &lt;rect x='64' y='96' width='368' height='330' rx='12' fill='#FFFFFF' stroke='#D8E3EE' /&gt;&lt;rect x='64' y='96' width='368' height='4' rx='2' fill='#1F5FA8' /&gt;&lt;text x='82' y='130' fontSize='15.5' fontWeight='bold' fill='#1F5FA8' textAnchor='start' fontFamily='Microsoft YaHei'&gt;基础档&lt;/text&gt;&lt;text x='82' y='169.0' fontSize='13' fill='#3A4A58' textAnchor='start' fontFamily='Microsoft YaHei'&gt;· 练习 10-1【给函数补测试】&lt;/text&gt;&lt;text x='82' y='197.5' fontSize='13' fill='#3A4A58' textAnchor='start' fontFamily='Microsoft YaHei'&gt;· text_utils.py：包含三个函数&lt;/text&gt;&lt;text x='82' y='226.0' fontSize='13' fill='#3A4A58' textAnchor='start' fontFamily='Microsoft YaHei'&gt;· count_words(text)：返回文本中的单词数&lt;/text&gt;&lt;rect x='468' y='96' width='368' height='330' rx='12' fill='#FFFFFF' stroke='#D8E3EE' /&gt;&lt;rect x='468' y='96' width='368' height='4' rx='2' fill='#1F5FA8' /&gt;&lt;text x='486' y='130' fontSize='15.5' fontWeight='bold' fill='#1F5FA8' textAnchor='start' fontFamily='Microsoft YaHei'&gt;进阶档&lt;/text&gt;&lt;text x='486' y='169.0' fontSize='13' fill='#3A4A58' textAnchor='start' fontFamily='Microsoft YaHei'&gt;· 练习 10-5【参数化测试】&lt;/text&gt;&lt;text x='486' y='197.5' fontSize='13' fill='#3A4A58' textAnchor='start' fontFamily='Microsoft YaHei'&gt;· &quot;hello world&quot; → 2&lt;/text&gt;&lt;text x='486' y='226.0' fontSize='13' fill='#3A4A58' textAnchor='start' fontFamily='Microsoft YaHei'&gt;· &quot;&quot; → 0&lt;/text&gt;&lt;rect x='872' y='96' width='368' height='330' rx='12' fill='#FFFFFF' stroke='#D8E3EE' /&gt;&lt;rect x='872' y='96' width='368' height='4' rx='2' fill='#1F5FA8' /&gt;&lt;text x='890' y='130' fontSize='15.5' fontWeight='bold' fill='#1F5FA8' textAnchor='start' fontFamily='Microsoft YaHei'&gt;参考答案 10-1&lt;/text&gt;&lt;text x='890' y='169.0' fontSize='13' fill='#3A4A58' textAnchor='start' fontFamily='Microsoft YaHei'&gt;· def count_words(text):&lt;/text&gt;&lt;rect x='64' y='574' width='1152' height='66' rx='12' fill='#EEF5FB' /&gt;&lt;text x='84' y='616' fontSize='14' fill='#243444' textAnchor='start' fontFamily='Microsoft YaHei'&gt;看不懂的地方先回讲义对应小节读一遍，再回来对着这页复述一次——能讲出来才算真懂。&lt;/text&gt;&#13;&#10;            &lt;text x='64' y='684' fontSize='13' fill='#8A9AAA' fontFamily='Microsoft YaHei'&gt;Python 讲授课件 · 逐节版&lt;/text&gt;&#13;&#10;            &lt;text x='1216' y='684' fontSize='13' fill='#8A9AAA' textAnchor='end' fontFamily='Microsoft YaHei'&gt;单元 10 · 第 56 节&lt;/text&gt;&#13;&#10;        &lt;/svg&gt;&#13;&#10;    &lt;/Box&gt;&#13;&#10;&lt;/Slide&gt;&#13;&#10;"/>
+        <p:cNvPr id="15" name="" descr="&lt;Slide style={{ width: '1280px', height: '720px', backgroundColor: '#FAFCFE', padding: 0, position: 'relative', overflow: 'hidden' }}&gt;&#13;&#10;    &lt;Box style={{ position: 'absolute', left: 64, top: 36, width: '1152px', flexDirection: 'row', alignItems: 'center', gap: 12 }}&gt;&#13;&#10;        &lt;Box style={{ background: '#0E9B78', borderRadius: 5, padding: '3px 11px' }}&gt;&#13;&#10;            &lt;Text style={{ fontSize: 14, fontWeight: 'bold', color: '#FFFFFF' }}&gt;第 56 节&lt;/Text&gt;&#13;&#10;        &lt;/Box&gt;&#13;&#10;        &lt;Text style={{ fontSize: 30, fontWeight: 'bold', color: '#16232E' }}&gt;核心知识点&lt;/Text&gt;&#13;&#10;        &lt;Text style={{ fontSize: 15, color: '#5A6B7A', marginTop: 10 }}&gt;· 动手实战、答案与验收&lt;/Text&gt;&#13;&#10;    &lt;/Box&gt;&#13;&#10;    &lt;Box style={{ position: 'absolute', left: 0, top: 0, width: '1280px', height: '720px' }}&gt;&#13;&#10;        &lt;svg width='1280' height='720' viewBox='0 0 1280 720'&gt;&#13;&#10;            &lt;rect x='64' y='96' width='368' height='330' rx='12' fill='#FFFFFF' stroke='#D8E3EE' /&gt;&lt;rect x='64' y='96' width='368' height='4' rx='2' fill='#1F5FA8' /&gt;&lt;text x='82' y='130' fontSize='15.5' fontWeight='bold' fill='#1F5FA8' textAnchor='start' fontFamily='Microsoft YaHei'&gt;基础档&lt;/text&gt;&lt;text x='82' y='169.0' fontSize='13' fill='#3A4A58' textAnchor='start' fontFamily='Microsoft YaHei'&gt;· 练习 10-1【给函数补测试】&lt;/text&gt;&lt;text x='82' y='197.5' fontSize='13' fill='#3A4A58' textAnchor='start' fontFamily='Microsoft YaHei'&gt;· text_utils.py：包含三个函数&lt;/text&gt;&lt;text x='82' y='226.0' fontSize='13' fill='#3A4A58' textAnchor='start' fontFamily='Microsoft YaHei'&gt;· count_words(text)：返回文本中的单词数&lt;/text&gt;&lt;rect x='468' y='96' width='368' height='330' rx='12' fill='#FFFFFF' stroke='#D8E3EE' /&gt;&lt;rect x='468' y='96' width='368' height='4' rx='2' fill='#1F5FA8' /&gt;&lt;text x='486' y='130' fontSize='15.5' fontWeight='bold' fill='#1F5FA8' textAnchor='start' fontFamily='Microsoft YaHei'&gt;进阶档&lt;/text&gt;&lt;text x='486' y='169.0' fontSize='13' fill='#3A4A58' textAnchor='start' fontFamily='Microsoft YaHei'&gt;· 练习 10-5【参数化测试】&lt;/text&gt;&lt;text x='486' y='197.5' fontSize='13' fill='#3A4A58' textAnchor='start' fontFamily='Microsoft YaHei'&gt;· &quot;hello world&quot; → 2&lt;/text&gt;&lt;text x='486' y='226.0' fontSize='13' fill='#3A4A58' textAnchor='start' fontFamily='Microsoft YaHei'&gt;· &quot;&quot; → 0&lt;/text&gt;&lt;rect x='872' y='96' width='368' height='330' rx='12' fill='#FFFFFF' stroke='#D8E3EE' /&gt;&lt;rect x='872' y='96' width='368' height='4' rx='2' fill='#1F5FA8' /&gt;&lt;text x='890' y='130' fontSize='15.5' fontWeight='bold' fill='#1F5FA8' textAnchor='start' fontFamily='Microsoft YaHei'&gt;参考答案 10-4&lt;/text&gt;&lt;text x='890' y='169.0' fontSize='13' fill='#3A4A58' textAnchor='start' fontFamily='Microsoft YaHei'&gt;· 报告里最有用的是哪几行&lt;/text&gt;&lt;text x='890' y='197.5' fontSize='13' fill='#3A4A58' textAnchor='start' fontFamily='Microsoft YaHei'&gt;· E assert 270 == 90 —— 一眼看出实际值 270、&lt;/text&gt;&lt;text x='890' y='217.0' fontSize='13' fill='#3A4A58' textAnchor='start' fontFamily='Microsoft YaHei'&gt;期望值 90&lt;/text&gt;&lt;text x='890' y='245.5' fontSize='13' fill='#3A4A58' textAnchor='start' fontFamily='Microsoft YaHei'&gt;· + where 270 = calculate_average([80, 90…&lt;/text&gt;&lt;rect x='64' y='574' width='1152' height='66' rx='12' fill='#EEF5FB' /&gt;&lt;text x='84' y='616' fontSize='14' fill='#243444' textAnchor='start' fontFamily='Microsoft YaHei'&gt;看不懂的地方先回讲义对应小节读一遍，再回来对着这页复述一次——能讲出来才算真懂。&lt;/text&gt;&#13;&#10;            &lt;text x='64' y='684' fontSize='13' fill='#8A9AAA' fontFamily='Microsoft YaHei'&gt;Python 讲授课件 · 逐节版&lt;/text&gt;&#13;&#10;            &lt;text x='1216' y='684' fontSize='13' fill='#8A9AAA' textAnchor='end' fontFamily='Microsoft YaHei'&gt;单元 10 · 第 56 节&lt;/text&gt;&#13;&#10;        &lt;/svg&gt;&#13;&#10;    &lt;/Box&gt;&#13;&#10;&lt;/Slide&gt;&#13;&#10;"/>
         <p:cNvGrpSpPr/>
         <p:nvPr/>
       </p:nvGrpSpPr>
@@ -4322,7 +2090,7 @@
   <p:cSld>
     <p:spTree>
       <p:nvGrpSpPr>
-        <p:cNvPr id="42" name="" descr="&lt;Slide style={{ width: '1280px', height: '720px', backgroundColor: '#FAFCFE', padding: 0, position: 'relative', overflow: 'hidden' }}&gt;&#13;&#10;    &lt;Box style={{ position: 'absolute', left: 64, top: 36, width: '1152px', flexDirection: 'row', alignItems: 'center', gap: 12 }}&gt;&#13;&#10;        &lt;Box style={{ background: '#0E9B78', borderRadius: 5, padding: '3px 11px' }}&gt;&#13;&#10;            &lt;Text style={{ fontSize: 14, fontWeight: 'bold', color: '#FFFFFF' }}&gt;第 52 节&lt;/Text&gt;&#13;&#10;        &lt;/Box&gt;&#13;&#10;        &lt;Text style={{ fontSize: 30, fontWeight: 'bold', color: '#16232E' }}&gt;核心知识点&lt;/Text&gt;&#13;&#10;        &lt;Text style={{ fontSize: 15, color: '#5A6B7A', marginTop: 10 }}&gt;· 为什么需要测试与三条命名规则&lt;/Text&gt;&#13;&#10;    &lt;/Box&gt;&#13;&#10;    &lt;Box style={{ position: 'absolute', left: 0, top: 0, width: '1280px', height: '720px' }}&gt;&#13;&#10;        &lt;svg width='1280' height='720' viewBox='0 0 1280 720'&gt;&#13;&#10;            &lt;rect x='64' y='96' width='368' height='330' rx='12' fill='#FFFFFF' stroke='#D8E3EE' /&gt;&lt;rect x='64' y='96' width='368' height='4' rx='2' fill='#1F5FA8' /&gt;&lt;text x='82' y='130' fontSize='15.5' fontWeight='bold' fill='#1F5FA8' textAnchor='start' fontFamily='Microsoft YaHei'&gt;2.1 为什么需要测试：Bug 有两种&lt;/text&gt;&lt;text x='82' y='169.0' fontSize='13' fill='#3A4A58' textAnchor='start' fontFamily='Microsoft YaHei'&gt;· 逻辑错误是测试唯一能对付的东西。 语法错误在第一次&lt;/text&gt;&lt;text x='82' y='188.5' fontSize='13' fill='#3A4A58' textAnchor='start' fontFamily='Microsoft YaHei'&gt;运行时就会暴露，根本不需要测试。&lt;/text&gt;&lt;rect x='468' y='96' width='368' height='330' rx='12' fill='#FFFFFF' stroke='#D8E3EE' /&gt;&lt;rect x='468' y='96' width='368' height='4' rx='2' fill='#1F5FA8' /&gt;&lt;text x='486' y='130' fontSize='15.5' fontWeight='bold' fill='#1F5FA8' textAnchor='start' fontFamily='Microsoft YaHei'&gt;2.2 自动化测试的价值&lt;/text&gt;&lt;text x='486' y='169.0' fontSize='13' fill='#3A4A58' textAnchor='start' fontFamily='Microsoft YaHei'&gt;· 手动测试：改一次代码 → 手动跑一遍所有功能 → 累&lt;/text&gt;&lt;text x='486' y='188.5' fontSize='13' fill='#3A4A58' textAnchor='start' fontFamily='Microsoft YaHei'&gt;。&lt;/text&gt;&lt;text x='486' y='217.0' fontSize='13' fill='#3A4A58' textAnchor='start' fontFamily='Microsoft YaHei'&gt;· 自动化测试：改一次代码 → 跑一条命令 pytest → &lt;/text&gt;&lt;text x='486' y='236.5' fontSize='13' fill='#3A4A58' textAnchor='start' fontFamily='Microsoft YaHei'&gt;几秒内告诉你所有测试是否通过。&lt;/text&gt;&lt;text x='486' y='265.0' fontSize='13' fill='#3A4A58' textAnchor='start' fontFamily='Microsoft YaHei'&gt;· 手动测试像每次装修完都亲自去每个房间检查一遍门锁、&lt;/text&gt;&lt;text x='486' y='284.5' fontSize='13' fill='#3A4A58' textAnchor='start' fontFamily='Microsoft YaHei'&gt;水电——可靠但极慢。&lt;/text&gt;&lt;rect x='872' y='96' width='368' height='330' rx='12' fill='#FFFFFF' stroke='#D8E3EE' /&gt;&lt;rect x='872' y='96' width='368' height='4' rx='2' fill='#1F5FA8' /&gt;&lt;text x='890' y='130' fontSize='15.5' fontWeight='bold' fill='#1F5FA8' textAnchor='start' fontFamily='Microsoft YaHei'&gt;2.3 三条硬性命名规则&lt;/text&gt;&lt;text x='890' y='169.0' fontSize='13' fill='#3A4A58' textAnchor='start' fontFamily='Microsoft YaHei'&gt;· 最高频的坑：文件名或函数名少写了 test_，pytest &lt;/text&gt;&lt;text x='890' y='188.5' fontSize='13' fill='#3A4A58' textAnchor='start' fontFamily='Microsoft YaHei'&gt;静默地不跑它——不报错，但也不执行。如果你…&lt;/text&gt;&lt;rect x='64' y='574' width='1152' height='66' rx='12' fill='#EEF5FB' /&gt;&lt;text x='84' y='616' fontSize='14' fill='#243444' textAnchor='start' fontFamily='Microsoft YaHei'&gt;看不懂的地方先回讲义对应小节读一遍，再回来对着这页复述一次——能讲出来才算真懂。&lt;/text&gt;&#13;&#10;            &lt;text x='64' y='684' fontSize='13' fill='#8A9AAA' fontFamily='Microsoft YaHei'&gt;Python 讲授课件 · 逐节版&lt;/text&gt;&#13;&#10;            &lt;text x='1216' y='684' fontSize='13' fill='#8A9AAA' textAnchor='end' fontFamily='Microsoft YaHei'&gt;单元 10 · 第 52 节&lt;/text&gt;&#13;&#10;        &lt;/svg&gt;&#13;&#10;    &lt;/Box&gt;&#13;&#10;&lt;/Slide&gt;&#13;&#10;"/>
+        <p:cNvPr id="42" name="" descr="&lt;Slide style={{ width: '1280px', height: '720px', backgroundColor: '#FAFCFE', padding: 0, position: 'relative', overflow: 'hidden' }}&gt;&#13;&#10;    &lt;Box style={{ position: 'absolute', left: 64, top: 36, width: '1152px', flexDirection: 'row', alignItems: 'center', gap: 12 }}&gt;&#13;&#10;        &lt;Box style={{ background: '#0E9B78', borderRadius: 5, padding: '3px 11px' }}&gt;&#13;&#10;            &lt;Text style={{ fontSize: 14, fontWeight: 'bold', color: '#FFFFFF' }}&gt;第 52 节&lt;/Text&gt;&#13;&#10;        &lt;/Box&gt;&#13;&#10;        &lt;Text style={{ fontSize: 30, fontWeight: 'bold', color: '#16232E' }}&gt;核心知识点&lt;/Text&gt;&#13;&#10;        &lt;Text style={{ fontSize: 15, color: '#5A6B7A', marginTop: 10 }}&gt;· 为什么需要测试与三条命名规则&lt;/Text&gt;&#13;&#10;    &lt;/Box&gt;&#13;&#10;    &lt;Box style={{ position: 'absolute', left: 0, top: 0, width: '1280px', height: '720px' }}&gt;&#13;&#10;        &lt;svg width='1280' height='720' viewBox='0 0 1280 720'&gt;&#13;&#10;            &lt;rect x='64' y='96' width='368' height='330' rx='12' fill='#FFFFFF' stroke='#D8E3EE' /&gt;&lt;rect x='64' y='96' width='368' height='4' rx='2' fill='#1F5FA8' /&gt;&lt;text x='82' y='130' fontSize='15.5' fontWeight='bold' fill='#1F5FA8' textAnchor='start' fontFamily='Microsoft YaHei'&gt;2.1 为什么需要测试：Bug 有两种&lt;/text&gt;&lt;text x='82' y='169.0' fontSize='13' fill='#3A4A58' textAnchor='start' fontFamily='Microsoft YaHei'&gt;· 逻辑错误是测试唯一能对付的东西。&lt;/text&gt;&lt;rect x='468' y='96' width='368' height='330' rx='12' fill='#FFFFFF' stroke='#D8E3EE' /&gt;&lt;rect x='468' y='96' width='368' height='4' rx='2' fill='#1F5FA8' /&gt;&lt;text x='486' y='130' fontSize='15.5' fontWeight='bold' fill='#1F5FA8' textAnchor='start' fontFamily='Microsoft YaHei'&gt;2.2 自动化测试的价值&lt;/text&gt;&lt;text x='486' y='169.0' fontSize='13' fill='#3A4A58' textAnchor='start' fontFamily='Microsoft YaHei'&gt;· 手动测试&lt;/text&gt;&lt;text x='486' y='197.5' fontSize='13' fill='#3A4A58' textAnchor='start' fontFamily='Microsoft YaHei'&gt;· 自动化测试&lt;/text&gt;&lt;text x='486' y='226.0' fontSize='13' fill='#3A4A58' textAnchor='start' fontFamily='Microsoft YaHei'&gt;· 手动测试像每次装修完都亲自去每个房间检查一遍门锁、&lt;/text&gt;&lt;text x='486' y='245.5' fontSize='13' fill='#3A4A58' textAnchor='start' fontFamily='Microsoft YaHei'&gt;水电——可靠但极慢。&lt;/text&gt;&lt;rect x='872' y='96' width='368' height='330' rx='12' fill='#FFFFFF' stroke='#D8E3EE' /&gt;&lt;rect x='872' y='96' width='368' height='4' rx='2' fill='#1F5FA8' /&gt;&lt;text x='890' y='130' fontSize='15.5' fontWeight='bold' fill='#1F5FA8' textAnchor='start' fontFamily='Microsoft YaHei'&gt;2.3 三条硬性命名规则&lt;/text&gt;&lt;text x='890' y='169.0' fontSize='13' fill='#3A4A58' textAnchor='start' fontFamily='Microsoft YaHei'&gt;· 最高频的坑&lt;/text&gt;&lt;rect x='64' y='574' width='1152' height='66' rx='12' fill='#EEF5FB' /&gt;&lt;text x='84' y='616' fontSize='14' fill='#243444' textAnchor='start' fontFamily='Microsoft YaHei'&gt;看不懂的地方先回讲义对应小节读一遍，再回来对着这页复述一次——能讲出来才算真懂。&lt;/text&gt;&#13;&#10;            &lt;text x='64' y='684' fontSize='13' fill='#8A9AAA' fontFamily='Microsoft YaHei'&gt;Python 讲授课件 · 逐节版&lt;/text&gt;&#13;&#10;            &lt;text x='1216' y='684' fontSize='13' fill='#8A9AAA' textAnchor='end' fontFamily='Microsoft YaHei'&gt;单元 10 · 第 52 节&lt;/text&gt;&#13;&#10;        &lt;/svg&gt;&#13;&#10;    &lt;/Box&gt;&#13;&#10;&lt;/Slide&gt;&#13;&#10;"/>
         <p:cNvGrpSpPr/>
         <p:nvPr/>
       </p:nvGrpSpPr>
@@ -4763,7 +2531,7 @@
   <p:cSld>
     <p:spTree>
       <p:nvGrpSpPr>
-        <p:cNvPr id="55" name="" descr="&lt;Slide style={{ width: '1280px', height: '720px', backgroundColor: '#FAFCFE', padding: 0, position: 'relative', overflow: 'hidden' }}&gt;&#13;&#10;    &lt;Box style={{ position: 'absolute', left: 64, top: 36, width: '1152px', flexDirection: 'row', alignItems: 'center', gap: 12 }}&gt;&#13;&#10;        &lt;Box style={{ background: '#0E9B78', borderRadius: 5, padding: '3px 11px' }}&gt;&#13;&#10;            &lt;Text style={{ fontSize: 14, fontWeight: 'bold', color: '#FFFFFF' }}&gt;第 53 节&lt;/Text&gt;&#13;&#10;        &lt;/Box&gt;&#13;&#10;        &lt;Text style={{ fontSize: 30, fontWeight: 'bold', color: '#16232E' }}&gt;核心知识点&lt;/Text&gt;&#13;&#10;        &lt;Text style={{ fontSize: 15, color: '#5A6B7A', marginTop: 10 }}&gt;· assert 与测试用例设计&lt;/Text&gt;&#13;&#10;    &lt;/Box&gt;&#13;&#10;    &lt;Box style={{ position: 'absolute', left: 0, top: 0, width: '1280px', height: '720px' }}&gt;&#13;&#10;        &lt;svg width='1280' height='720' viewBox='0 0 1280 720'&gt;&#13;&#10;            &lt;rect x='64' y='96' width='368' height='330' rx='12' fill='#FFFFFF' stroke='#D8E3EE' /&gt;&lt;rect x='64' y='96' width='368' height='4' rx='2' fill='#1F5FA8' /&gt;&lt;text x='82' y='130' fontSize='15.5' fontWeight='bold' fill='#1F5FA8' textAnchor='start' fontFamily='Microsoft YaHei'&gt;2.4 assert：用代码描述&quot;应该是什么&quot;&lt;/text&gt;&lt;text x='82' y='169.0' fontSize='13' fill='#3A4A58' textAnchor='start' fontFamily='Microsoft YaHei'&gt;· 关键在于 assert 里要写&quot;实际结果 == 预期结果&quot;，而&lt;/text&gt;&lt;text x='82' y='188.5' fontSize='13' fill='#3A4A58' textAnchor='start' fontFamily='Microsoft YaHei'&gt;不是只写实际结果：&lt;/text&gt;&lt;text x='82' y='217.0' fontSize='13' fill='#3A4A58' textAnchor='start' fontFamily='Microsoft YaHei'&gt;· 断言消息：可以给 assert 加一句说明，失败时这条消&lt;/text&gt;&lt;text x='82' y='236.5' fontSize='13' fill='#3A4A58' textAnchor='start' fontFamily='Microsoft YaHei'&gt;息会显示出来。这在测试复杂逻辑时非常有用：&lt;/text&gt;&lt;rect x='468' y='96' width='368' height='330' rx='12' fill='#FFFFFF' stroke='#D8E3EE' /&gt;&lt;rect x='468' y='96' width='368' height='4' rx='2' fill='#1F5FA8' /&gt;&lt;text x='486' y='130' fontSize='15.5' fontWeight='bold' fill='#1F5FA8' textAnchor='start' fontFamily='Microsoft YaHei'&gt;2.5 测试与被测代码必须分离&lt;/text&gt;&lt;text x='486' y='169.0' fontSize='13' fill='#3A4A58' textAnchor='start' fontFamily='Microsoft YaHei'&gt;· 不要把测试代码写在被测文件里。 正确做法是两个文件&lt;/text&gt;&lt;text x='486' y='188.5' fontSize='13' fill='#3A4A58' textAnchor='start' fontFamily='Microsoft YaHei'&gt;：&lt;/text&gt;&lt;rect x='872' y='96' width='368' height='330' rx='12' fill='#FFFFFF' stroke='#D8E3EE' /&gt;&lt;rect x='872' y='96' width='368' height='4' rx='2' fill='#1F5FA8' /&gt;&lt;text x='890' y='130' fontSize='15.5' fontWeight='bold' fill='#1F5FA8' textAnchor='start' fontFamily='Microsoft YaHei'&gt;2.6 测试用例的设计：正常 + 边界&lt;/text&gt;&lt;text x='890' y='169.0' fontSize='13' fill='#3A4A58' textAnchor='start' fontFamily='Microsoft YaHei'&gt;· 一个好的测试不只测&quot;正常情况&quot;，更重要的是测&quot;极端情&lt;/text&gt;&lt;text x='890' y='188.5' fontSize='13' fill='#3A4A58' textAnchor='start' fontFamily='Microsoft YaHei'&gt;况&quot;。&lt;/text&gt;&lt;text x='890' y='217.0' fontSize='13' fill='#3A4A58' textAnchor='start' fontFamily='Microsoft YaHei'&gt;· 除零、负数、空输入这三类是最容易藏 bug 的地方，也&lt;/text&gt;&lt;text x='890' y='236.5' fontSize='13' fill='#3A4A58' textAnchor='start' fontFamily='Microsoft YaHei'&gt;是面试和实际工作里最常被要求测试的点。本单元的练…&lt;/text&gt;&lt;rect x='64' y='574' width='1152' height='66' rx='12' fill='#EEF5FB' /&gt;&lt;text x='84' y='616' fontSize='14' fill='#243444' textAnchor='start' fontFamily='Microsoft YaHei'&gt;看不懂的地方先回讲义对应小节读一遍，再回来对着这页复述一次——能讲出来才算真懂。&lt;/text&gt;&#13;&#10;            &lt;text x='64' y='684' fontSize='13' fill='#8A9AAA' fontFamily='Microsoft YaHei'&gt;Python 讲授课件 · 逐节版&lt;/text&gt;&#13;&#10;            &lt;text x='1216' y='684' fontSize='13' fill='#8A9AAA' textAnchor='end' fontFamily='Microsoft YaHei'&gt;单元 10 · 第 53 节&lt;/text&gt;&#13;&#10;        &lt;/svg&gt;&#13;&#10;    &lt;/Box&gt;&#13;&#10;&lt;/Slide&gt;&#13;&#10;"/>
+        <p:cNvPr id="55" name="" descr="&lt;Slide style={{ width: '1280px', height: '720px', backgroundColor: '#FAFCFE', padding: 0, position: 'relative', overflow: 'hidden' }}&gt;&#13;&#10;    &lt;Box style={{ position: 'absolute', left: 64, top: 36, width: '1152px', flexDirection: 'row', alignItems: 'center', gap: 12 }}&gt;&#13;&#10;        &lt;Box style={{ background: '#0E9B78', borderRadius: 5, padding: '3px 11px' }}&gt;&#13;&#10;            &lt;Text style={{ fontSize: 14, fontWeight: 'bold', color: '#FFFFFF' }}&gt;第 53 节&lt;/Text&gt;&#13;&#10;        &lt;/Box&gt;&#13;&#10;        &lt;Text style={{ fontSize: 30, fontWeight: 'bold', color: '#16232E' }}&gt;核心知识点&lt;/Text&gt;&#13;&#10;        &lt;Text style={{ fontSize: 15, color: '#5A6B7A', marginTop: 10 }}&gt;· assert 与测试用例设计&lt;/Text&gt;&#13;&#10;    &lt;/Box&gt;&#13;&#10;    &lt;Box style={{ position: 'absolute', left: 0, top: 0, width: '1280px', height: '720px' }}&gt;&#13;&#10;        &lt;svg width='1280' height='720' viewBox='0 0 1280 720'&gt;&#13;&#10;            &lt;rect x='64' y='96' width='368' height='330' rx='12' fill='#FFFFFF' stroke='#D8E3EE' /&gt;&lt;rect x='64' y='96' width='368' height='4' rx='2' fill='#1F5FA8' /&gt;&lt;text x='82' y='130' fontSize='15.5' fontWeight='bold' fill='#1F5FA8' textAnchor='start' fontFamily='Microsoft YaHei'&gt;2.4 assert：用代码描述&quot;应该是什么&quot;&lt;/text&gt;&lt;text x='82' y='169.0' fontSize='13' fill='#3A4A58' textAnchor='start' fontFamily='Microsoft YaHei'&gt;· 关键在于 assert 里要写&quot;实际结果 == 预期结果&quot;，&lt;/text&gt;&lt;text x='82' y='188.5' fontSize='13' fill='#3A4A58' textAnchor='start' fontFamily='Microsoft YaHei'&gt;而不是只写实际结果&lt;/text&gt;&lt;text x='82' y='217.0' fontSize='13' fill='#3A4A58' textAnchor='start' fontFamily='Microsoft YaHei'&gt;· 断言消息&lt;/text&gt;&lt;rect x='468' y='96' width='368' height='330' rx='12' fill='#FFFFFF' stroke='#D8E3EE' /&gt;&lt;rect x='468' y='96' width='368' height='4' rx='2' fill='#1F5FA8' /&gt;&lt;text x='486' y='130' fontSize='15.5' fontWeight='bold' fill='#1F5FA8' textAnchor='start' fontFamily='Microsoft YaHei'&gt;2.5 测试与被测代码必须分离&lt;/text&gt;&lt;text x='486' y='169.0' fontSize='13' fill='#3A4A58' textAnchor='start' fontFamily='Microsoft YaHei'&gt;· 不要把测试代码写在被测文件里。&lt;/text&gt;&lt;rect x='872' y='96' width='368' height='330' rx='12' fill='#FFFFFF' stroke='#D8E3EE' /&gt;&lt;rect x='872' y='96' width='368' height='4' rx='2' fill='#1F5FA8' /&gt;&lt;text x='890' y='130' fontSize='15.5' fontWeight='bold' fill='#1F5FA8' textAnchor='start' fontFamily='Microsoft YaHei'&gt;2.6 测试用例的设计：正常 + 边界&lt;/text&gt;&lt;text x='890' y='169.0' fontSize='13' fill='#3A4A58' textAnchor='start' fontFamily='Microsoft YaHei'&gt;· 一个好的测试不只测&quot;正常情况&quot;，&lt;/text&gt;&lt;text x='890' y='188.5' fontSize='13' fill='#3A4A58' textAnchor='start' fontFamily='Microsoft YaHei'&gt;更重要的是测&quot;极端情况&quot;。&lt;/text&gt;&lt;text x='890' y='217.0' fontSize='13' fill='#3A4A58' textAnchor='start' fontFamily='Microsoft YaHei'&gt;· 除零、负数、空输入这三类是最容易藏 bug 的地方&lt;/text&gt;&lt;rect x='64' y='574' width='1152' height='66' rx='12' fill='#EEF5FB' /&gt;&lt;text x='84' y='616' fontSize='14' fill='#243444' textAnchor='start' fontFamily='Microsoft YaHei'&gt;看不懂的地方先回讲义对应小节读一遍，再回来对着这页复述一次——能讲出来才算真懂。&lt;/text&gt;&#13;&#10;            &lt;text x='64' y='684' fontSize='13' fill='#8A9AAA' fontFamily='Microsoft YaHei'&gt;Python 讲授课件 · 逐节版&lt;/text&gt;&#13;&#10;            &lt;text x='1216' y='684' fontSize='13' fill='#8A9AAA' textAnchor='end' fontFamily='Microsoft YaHei'&gt;单元 10 · 第 53 节&lt;/text&gt;&#13;&#10;        &lt;/svg&gt;&#13;&#10;    &lt;/Box&gt;&#13;&#10;&lt;/Slide&gt;&#13;&#10;"/>
         <p:cNvGrpSpPr/>
         <p:nvPr/>
       </p:nvGrpSpPr>
@@ -5204,7 +2972,7 @@
   <p:cSld>
     <p:spTree>
       <p:nvGrpSpPr>
-        <p:cNvPr id="68" name="" descr="&lt;Slide style={{ width: '1280px', height: '720px', backgroundColor: '#FAFCFE', padding: 0, position: 'relative', overflow: 'hidden' }}&gt;&#13;&#10;    &lt;Box style={{ position: 'absolute', left: 64, top: 36, width: '1152px', flexDirection: 'row', alignItems: 'center', gap: 12 }}&gt;&#13;&#10;        &lt;Box style={{ background: '#0E9B78', borderRadius: 5, padding: '3px 11px' }}&gt;&#13;&#10;            &lt;Text style={{ fontSize: 14, fontWeight: 'bold', color: '#FFFFFF' }}&gt;第 54 节&lt;/Text&gt;&#13;&#10;        &lt;/Box&gt;&#13;&#10;        &lt;Text style={{ fontSize: 30, fontWeight: 'bold', color: '#16232E' }}&gt;核心知识点&lt;/Text&gt;&#13;&#10;        &lt;Text style={{ fontSize: 15, color: '#5A6B7A', marginTop: 10 }}&gt;· parametrize、测试类与运行命令&lt;/Text&gt;&#13;&#10;    &lt;/Box&gt;&#13;&#10;    &lt;Box style={{ position: 'absolute', left: 0, top: 0, width: '1280px', height: '720px' }}&gt;&#13;&#10;        &lt;svg width='1280' height='720' viewBox='0 0 1280 720'&gt;&#13;&#10;            &lt;rect x='64' y='96' width='548' height='330' rx='12' fill='#FFFFFF' stroke='#D8E3EE' /&gt;&lt;rect x='64' y='96' width='548' height='4' rx='2' fill='#1F5FA8' /&gt;&lt;text x='82' y='130' fontSize='15.5' fontWeight='bold' fill='#1F5FA8' textAnchor='start' fontFamily='Microsoft YaHei'&gt;2.7 parametrize：一次测很多组数据&lt;/text&gt;&lt;text x='82' y='169.0' fontSize='13' fill='#3A4A58' textAnchor='start' fontFamily='Microsoft YaHei'&gt;· 如果同一个测试要跑 6 组数据，逐个写函数太浪费：&lt;/text&gt;&lt;rect x='668' y='96' width='548' height='330' rx='12' fill='#FFFFFF' stroke='#D8E3EE' /&gt;&lt;rect x='668' y='96' width='548' height='4' rx='2' fill='#1F5FA8' /&gt;&lt;text x='686' y='130' fontSize='15.5' fontWeight='bold' fill='#1F5FA8' textAnchor='start' fontFamily='Microsoft YaHei'&gt;2.8 运行 pytest 的常用命令&lt;/text&gt;&lt;text x='686' y='169.0' fontSize='13' fill='#3A4A58' textAnchor='start' fontFamily='Microsoft YaHei'&gt;· pytest # 运行当前目录所有测试&lt;/text&gt;&lt;rect x='64' y='574' width='1152' height='66' rx='12' fill='#EEF5FB' /&gt;&lt;text x='84' y='616' fontSize='14' fill='#243444' textAnchor='start' fontFamily='Microsoft YaHei'&gt;看不懂的地方先回讲义对应小节读一遍，再回来对着这页复述一次——能讲出来才算真懂。&lt;/text&gt;&#13;&#10;            &lt;text x='64' y='684' fontSize='13' fill='#8A9AAA' fontFamily='Microsoft YaHei'&gt;Python 讲授课件 · 逐节版&lt;/text&gt;&#13;&#10;            &lt;text x='1216' y='684' fontSize='13' fill='#8A9AAA' textAnchor='end' fontFamily='Microsoft YaHei'&gt;单元 10 · 第 54 节&lt;/text&gt;&#13;&#10;        &lt;/svg&gt;&#13;&#10;    &lt;/Box&gt;&#13;&#10;&lt;/Slide&gt;&#13;&#10;"/>
+        <p:cNvPr id="68" name="" descr="&lt;Slide style={{ width: '1280px', height: '720px', backgroundColor: '#FAFCFE', padding: 0, position: 'relative', overflow: 'hidden' }}&gt;&#13;&#10;    &lt;Box style={{ position: 'absolute', left: 64, top: 36, width: '1152px', flexDirection: 'row', alignItems: 'center', gap: 12 }}&gt;&#13;&#10;        &lt;Box style={{ background: '#0E9B78', borderRadius: 5, padding: '3px 11px' }}&gt;&#13;&#10;            &lt;Text style={{ fontSize: 14, fontWeight: 'bold', color: '#FFFFFF' }}&gt;第 54 节&lt;/Text&gt;&#13;&#10;        &lt;/Box&gt;&#13;&#10;        &lt;Text style={{ fontSize: 30, fontWeight: 'bold', color: '#16232E' }}&gt;核心知识点&lt;/Text&gt;&#13;&#10;        &lt;Text style={{ fontSize: 15, color: '#5A6B7A', marginTop: 10 }}&gt;· parametrize、测试类与运行命令&lt;/Text&gt;&#13;&#10;    &lt;/Box&gt;&#13;&#10;    &lt;Box style={{ position: 'absolute', left: 0, top: 0, width: '1280px', height: '720px' }}&gt;&#13;&#10;        &lt;svg width='1280' height='720' viewBox='0 0 1280 720'&gt;&#13;&#10;            &lt;rect x='64' y='96' width='548' height='330' rx='12' fill='#FFFFFF' stroke='#D8E3EE' /&gt;&lt;rect x='64' y='96' width='548' height='4' rx='2' fill='#1F5FA8' /&gt;&lt;text x='82' y='130' fontSize='15.5' fontWeight='bold' fill='#1F5FA8' textAnchor='start' fontFamily='Microsoft YaHei'&gt;2.7 parametrize：一次测很多组数据&lt;/text&gt;&lt;text x='82' y='169.0' fontSize='13' fill='#3A4A58' textAnchor='start' fontFamily='Microsoft YaHei'&gt;· pytest 会自动把这个测试展开成 4 个独立的测试，任何一个失败都会单独报告。&lt;/text&gt;&lt;rect x='668' y='96' width='548' height='330' rx='12' fill='#FFFFFF' stroke='#D8E3EE' /&gt;&lt;rect x='668' y='96' width='548' height='4' rx='2' fill='#1F5FA8' /&gt;&lt;text x='686' y='130' fontSize='15.5' fontWeight='bold' fill='#1F5FA8' textAnchor='start' fontFamily='Microsoft YaHei'&gt;2.8 运行 pytest 的常用命令&lt;/text&gt;&lt;text x='686' y='169.0' fontSize='13' fill='#3A4A58' textAnchor='start' fontFamily='Microsoft YaHei'&gt;· -v 是你用得最多的一个参数，因为它会告诉你哪个测试失败了、哪个通过了。&lt;/text&gt;&lt;rect x='64' y='574' width='1152' height='66' rx='12' fill='#EEF5FB' /&gt;&lt;text x='84' y='616' fontSize='14' fill='#243444' textAnchor='start' fontFamily='Microsoft YaHei'&gt;看不懂的地方先回讲义对应小节读一遍，再回来对着这页复述一次——能讲出来才算真懂。&lt;/text&gt;&#13;&#10;            &lt;text x='64' y='684' fontSize='13' fill='#8A9AAA' fontFamily='Microsoft YaHei'&gt;Python 讲授课件 · 逐节版&lt;/text&gt;&#13;&#10;            &lt;text x='1216' y='684' fontSize='13' fill='#8A9AAA' textAnchor='end' fontFamily='Microsoft YaHei'&gt;单元 10 · 第 54 节&lt;/text&gt;&#13;&#10;        &lt;/svg&gt;&#13;&#10;    &lt;/Box&gt;&#13;&#10;&lt;/Slide&gt;&#13;&#10;"/>
         <p:cNvGrpSpPr/>
         <p:nvPr/>
       </p:nvGrpSpPr>

--- a/python-course-ppt/逐节课件/Python讲授课件-单元10.pptx
+++ b/python-course-ppt/逐节课件/Python讲授课件-单元10.pptx
@@ -236,6 +236,1272 @@
     </a:lvl9pPr>
   </p:notesStyle>
 </p:notesMaster>
+</file>
+
+<file path=ppt/notesSlides/notesSlide1.xml><?xml version="1.0" encoding="utf-8"?>
+<p:notes xmlns:a="http://schemas.openxmlformats.org/drawingml/2006/main" xmlns:p="http://schemas.openxmlformats.org/presentationml/2006/main" xmlns:r="http://schemas.openxmlformats.org/officeDocument/2006/relationships">
+  <p:cSld>
+    <p:spTree>
+      <p:nvGrpSpPr>
+        <p:cNvPr id="1" name=""/>
+        <p:cNvGrpSpPr/>
+        <p:nvPr/>
+      </p:nvGrpSpPr>
+      <p:grpSpPr>
+        <a:xfrm>
+          <a:off x="0" y="0"/>
+          <a:ext cx="0" cy="0"/>
+          <a:chOff x="0" y="0"/>
+          <a:chExt cx="0" cy="0"/>
+        </a:xfrm>
+      </p:grpSpPr>
+      <p:sp>
+        <p:nvSpPr>
+          <p:cNvPr id="2" name="讲课提示"/>
+          <p:cNvSpPr txBox="1"/>
+          <p:nvPr/>
+        </p:nvSpPr>
+        <p:spPr>
+          <a:xfrm>
+            <a:off x="457200" y="457200"/>
+            <a:ext cx="6858000" cy="4800600"/>
+          </a:xfrm>
+          <a:prstGeom prst="rect">
+            <a:avLst/>
+          </a:prstGeom>
+        </p:spPr>
+        <p:txBody>
+          <a:bodyPr wrap="square"/>
+          <a:lstStyle/>
+          <a:p>
+            <a:r>
+              <a:rPr lang="zh-CN" dirty="0"/>
+              <a:t>单元 10 · 单元 10 · 测试代码</a:t>
+            </a:r>
+          </a:p>
+          <a:p>
+            <a:r>
+              <a:rPr lang="zh-CN" dirty="0"/>
+              <a:t/>
+            </a:r>
+          </a:p>
+          <a:p>
+            <a:r>
+              <a:rPr lang="zh-CN" dirty="0"/>
+              <a:t>本单元包含以下课节：</a:t>
+            </a:r>
+          </a:p>
+          <a:p>
+            <a:r>
+              <a:rPr lang="zh-CN" dirty="0"/>
+              <a:t>· 第 52 节 为什么需要测试与三条命名规则</a:t>
+            </a:r>
+          </a:p>
+          <a:p>
+            <a:r>
+              <a:rPr lang="zh-CN" dirty="0"/>
+              <a:t>· 第 53 节 assert 与测试用例设计</a:t>
+            </a:r>
+          </a:p>
+          <a:p>
+            <a:r>
+              <a:rPr lang="zh-CN" dirty="0"/>
+              <a:t>· 第 54 节 parametrize、测试类与运行命令</a:t>
+            </a:r>
+          </a:p>
+          <a:p>
+            <a:r>
+              <a:rPr lang="zh-CN" dirty="0"/>
+              <a:t>· 第 55 节 测试夹具与示例串讲</a:t>
+            </a:r>
+          </a:p>
+          <a:p>
+            <a:r>
+              <a:rPr lang="zh-CN" dirty="0"/>
+              <a:t>· 第 56 节 动手实战、答案与验收</a:t>
+            </a:r>
+          </a:p>
+          <a:p>
+            <a:r>
+              <a:rPr lang="zh-CN" dirty="0"/>
+              <a:t/>
+            </a:r>
+          </a:p>
+          <a:p>
+            <a:r>
+              <a:rPr lang="zh-CN" dirty="0"/>
+              <a:t>开场用 3 分钟讲清：这个单元学完能做出什么，最后会被关卡怎么验。</a:t>
+            </a:r>
+          </a:p>
+        </p:txBody>
+      </p:sp>
+    </p:spTree>
+  </p:cSld>
+  <p:clrMapOvr>
+    <a:masterClrMapping/>
+  </p:clrMapOvr>
+</p:notes>
+</file>
+
+<file path=ppt/notesSlides/notesSlide10.xml><?xml version="1.0" encoding="utf-8"?>
+<p:notes xmlns:a="http://schemas.openxmlformats.org/drawingml/2006/main" xmlns:p="http://schemas.openxmlformats.org/presentationml/2006/main" xmlns:r="http://schemas.openxmlformats.org/officeDocument/2006/relationships">
+  <p:cSld>
+    <p:spTree>
+      <p:nvGrpSpPr>
+        <p:cNvPr id="1" name=""/>
+        <p:cNvGrpSpPr/>
+        <p:nvPr/>
+      </p:nvGrpSpPr>
+      <p:grpSpPr>
+        <a:xfrm>
+          <a:off x="0" y="0"/>
+          <a:ext cx="0" cy="0"/>
+          <a:chOff x="0" y="0"/>
+          <a:chExt cx="0" cy="0"/>
+        </a:xfrm>
+      </p:grpSpPr>
+      <p:sp>
+        <p:nvSpPr>
+          <p:cNvPr id="2" name="讲课提示"/>
+          <p:cNvSpPr txBox="1"/>
+          <p:nvPr/>
+        </p:nvSpPr>
+        <p:spPr>
+          <a:xfrm>
+            <a:off x="457200" y="457200"/>
+            <a:ext cx="6858000" cy="4800600"/>
+          </a:xfrm>
+          <a:prstGeom prst="rect">
+            <a:avLst/>
+          </a:prstGeom>
+        </p:spPr>
+        <p:txBody>
+          <a:bodyPr wrap="square"/>
+          <a:lstStyle/>
+          <a:p>
+            <a:r>
+              <a:rPr lang="zh-CN" dirty="0"/>
+              <a:t>第 56 节 · 动手实战、答案与验收</a:t>
+            </a:r>
+          </a:p>
+          <a:p>
+            <a:r>
+              <a:rPr lang="zh-CN" dirty="0"/>
+              <a:t>单元 10 · 测试代码 · W12</a:t>
+            </a:r>
+          </a:p>
+          <a:p>
+            <a:r>
+              <a:rPr lang="zh-CN" dirty="0"/>
+              <a:t/>
+            </a:r>
+          </a:p>
+          <a:p>
+            <a:r>
+              <a:rPr lang="zh-CN" dirty="0"/>
+              <a:t>学习目标：独立完成单元 10 练习，能为函数写出完整测试套件</a:t>
+            </a:r>
+          </a:p>
+          <a:p>
+            <a:r>
+              <a:rPr lang="zh-CN" dirty="0"/>
+              <a:t/>
+            </a:r>
+          </a:p>
+          <a:p>
+            <a:r>
+              <a:rPr lang="zh-CN" dirty="0"/>
+              <a:t>课堂实操（40 分钟，不看答案）：</a:t>
+            </a:r>
+          </a:p>
+          <a:p>
+            <a:r>
+              <a:rPr lang="zh-CN" dirty="0"/>
+              <a:t>· ★ 动手项目 11.1–11.3 投票分析器测试</a:t>
+            </a:r>
+          </a:p>
+          <a:p>
+            <a:r>
+              <a:rPr lang="zh-CN" dirty="0"/>
+              <a:t>· 限时 30 分钟独立完成基础档</a:t>
+            </a:r>
+          </a:p>
+          <a:p>
+            <a:r>
+              <a:rPr lang="zh-CN" dirty="0"/>
+              <a:t>· 逐题对照答案并打勾验收自测</a:t>
+            </a:r>
+          </a:p>
+          <a:p>
+            <a:r>
+              <a:rPr lang="zh-CN" dirty="0"/>
+              <a:t/>
+            </a:r>
+          </a:p>
+          <a:p>
+            <a:r>
+              <a:rPr lang="zh-CN" dirty="0"/>
+              <a:t>课后作业：</a:t>
+            </a:r>
+          </a:p>
+          <a:p>
+            <a:r>
+              <a:rPr lang="zh-CN" dirty="0"/>
+              <a:t>· 产出：pytest 套件 ≥10 条</a:t>
+            </a:r>
+          </a:p>
+          <a:p>
+            <a:r>
+              <a:rPr lang="zh-CN" dirty="0"/>
+              <a:t>· 完成本单元小结与产出检查</a:t>
+            </a:r>
+          </a:p>
+          <a:p>
+            <a:r>
+              <a:rPr lang="zh-CN" dirty="0"/>
+              <a:t/>
+            </a:r>
+          </a:p>
+          <a:p>
+            <a:r>
+              <a:rPr lang="zh-CN" dirty="0"/>
+              <a:t>节奏：讲 20 分钟 → 学员自己敲 40 分钟（不看答案）→ 对讲评自查 20 分钟 → 写作业 10 分钟。</a:t>
+            </a:r>
+          </a:p>
+        </p:txBody>
+      </p:sp>
+    </p:spTree>
+  </p:cSld>
+  <p:clrMapOvr>
+    <a:masterClrMapping/>
+  </p:clrMapOvr>
+</p:notes>
+</file>
+
+<file path=ppt/notesSlides/notesSlide11.xml><?xml version="1.0" encoding="utf-8"?>
+<p:notes xmlns:a="http://schemas.openxmlformats.org/drawingml/2006/main" xmlns:p="http://schemas.openxmlformats.org/presentationml/2006/main" xmlns:r="http://schemas.openxmlformats.org/officeDocument/2006/relationships">
+  <p:cSld>
+    <p:spTree>
+      <p:nvGrpSpPr>
+        <p:cNvPr id="1" name=""/>
+        <p:cNvGrpSpPr/>
+        <p:nvPr/>
+      </p:nvGrpSpPr>
+      <p:grpSpPr>
+        <a:xfrm>
+          <a:off x="0" y="0"/>
+          <a:ext cx="0" cy="0"/>
+          <a:chOff x="0" y="0"/>
+          <a:chExt cx="0" cy="0"/>
+        </a:xfrm>
+      </p:grpSpPr>
+      <p:sp>
+        <p:nvSpPr>
+          <p:cNvPr id="2" name="讲课提示"/>
+          <p:cNvSpPr txBox="1"/>
+          <p:nvPr/>
+        </p:nvSpPr>
+        <p:spPr>
+          <a:xfrm>
+            <a:off x="457200" y="457200"/>
+            <a:ext cx="6858000" cy="4800600"/>
+          </a:xfrm>
+          <a:prstGeom prst="rect">
+            <a:avLst/>
+          </a:prstGeom>
+        </p:spPr>
+        <p:txBody>
+          <a:bodyPr wrap="square"/>
+          <a:lstStyle/>
+          <a:p>
+            <a:r>
+              <a:rPr lang="zh-CN" dirty="0"/>
+              <a:t>第 56 节 · 核心知识点：动手实战、答案与验收</a:t>
+            </a:r>
+          </a:p>
+          <a:p>
+            <a:r>
+              <a:rPr lang="zh-CN" dirty="0"/>
+              <a:t/>
+            </a:r>
+          </a:p>
+          <a:p>
+            <a:r>
+              <a:rPr lang="zh-CN" dirty="0"/>
+              <a:t>讲这一页时：先让学生说出上节课的结论，再逐块讲要点。</a:t>
+            </a:r>
+          </a:p>
+          <a:p>
+            <a:r>
+              <a:rPr lang="zh-CN" dirty="0"/>
+              <a:t>每讲完一块，问一句「这一步如果写错了，报错会长什么样？」——把错误提前讲。</a:t>
+            </a:r>
+          </a:p>
+          <a:p>
+            <a:r>
+              <a:rPr lang="zh-CN" dirty="0"/>
+              <a:t/>
+            </a:r>
+          </a:p>
+          <a:p>
+            <a:r>
+              <a:rPr lang="zh-CN" dirty="0"/>
+              <a:t>本节目标：独立完成单元 10 练习，能为函数写出完整测试套件</a:t>
+            </a:r>
+          </a:p>
+          <a:p>
+            <a:r>
+              <a:rPr lang="zh-CN" dirty="0"/>
+              <a:t/>
+            </a:r>
+          </a:p>
+          <a:p>
+            <a:r>
+              <a:rPr lang="zh-CN" dirty="0"/>
+              <a:t>看不到懂的地方，回讲义对应小节读一遍，再回来对着这页复述一次——能讲出来才算真懂。</a:t>
+            </a:r>
+          </a:p>
+        </p:txBody>
+      </p:sp>
+    </p:spTree>
+  </p:cSld>
+  <p:clrMapOvr>
+    <a:masterClrMapping/>
+  </p:clrMapOvr>
+</p:notes>
+</file>
+
+<file path=ppt/notesSlides/notesSlide12.xml><?xml version="1.0" encoding="utf-8"?>
+<p:notes xmlns:a="http://schemas.openxmlformats.org/drawingml/2006/main" xmlns:p="http://schemas.openxmlformats.org/presentationml/2006/main" xmlns:r="http://schemas.openxmlformats.org/officeDocument/2006/relationships">
+  <p:cSld>
+    <p:spTree>
+      <p:nvGrpSpPr>
+        <p:cNvPr id="1" name=""/>
+        <p:cNvGrpSpPr/>
+        <p:nvPr/>
+      </p:nvGrpSpPr>
+      <p:grpSpPr>
+        <a:xfrm>
+          <a:off x="0" y="0"/>
+          <a:ext cx="0" cy="0"/>
+          <a:chOff x="0" y="0"/>
+          <a:chExt cx="0" cy="0"/>
+        </a:xfrm>
+      </p:grpSpPr>
+      <p:sp>
+        <p:nvSpPr>
+          <p:cNvPr id="2" name="讲课提示"/>
+          <p:cNvSpPr txBox="1"/>
+          <p:nvPr/>
+        </p:nvSpPr>
+        <p:spPr>
+          <a:xfrm>
+            <a:off x="457200" y="457200"/>
+            <a:ext cx="6858000" cy="4800600"/>
+          </a:xfrm>
+          <a:prstGeom prst="rect">
+            <a:avLst/>
+          </a:prstGeom>
+        </p:spPr>
+        <p:txBody>
+          <a:bodyPr wrap="square"/>
+          <a:lstStyle/>
+          <a:p>
+            <a:r>
+              <a:rPr lang="zh-CN" dirty="0"/>
+              <a:t>单元 10 小结 · 单元 10 · 小结</a:t>
+            </a:r>
+          </a:p>
+          <a:p>
+            <a:r>
+              <a:rPr lang="zh-CN" dirty="0"/>
+              <a:t/>
+            </a:r>
+          </a:p>
+          <a:p>
+            <a:r>
+              <a:rPr lang="zh-CN" dirty="0"/>
+              <a:t>收尾动作：让学生合上讲义，口述本单元三个最重要的结论；说不出来的，回对应课节。</a:t>
+            </a:r>
+          </a:p>
+          <a:p>
+            <a:r>
+              <a:rPr lang="zh-CN" dirty="0"/>
+              <a:t>然后当场勾一遍本单元课节的「已完成」，没打勾的进下一单元前补掉。</a:t>
+            </a:r>
+          </a:p>
+        </p:txBody>
+      </p:sp>
+    </p:spTree>
+  </p:cSld>
+  <p:clrMapOvr>
+    <a:masterClrMapping/>
+  </p:clrMapOvr>
+</p:notes>
+</file>
+
+<file path=ppt/notesSlides/notesSlide2.xml><?xml version="1.0" encoding="utf-8"?>
+<p:notes xmlns:a="http://schemas.openxmlformats.org/drawingml/2006/main" xmlns:p="http://schemas.openxmlformats.org/presentationml/2006/main" xmlns:r="http://schemas.openxmlformats.org/officeDocument/2006/relationships">
+  <p:cSld>
+    <p:spTree>
+      <p:nvGrpSpPr>
+        <p:cNvPr id="1" name=""/>
+        <p:cNvGrpSpPr/>
+        <p:nvPr/>
+      </p:nvGrpSpPr>
+      <p:grpSpPr>
+        <a:xfrm>
+          <a:off x="0" y="0"/>
+          <a:ext cx="0" cy="0"/>
+          <a:chOff x="0" y="0"/>
+          <a:chExt cx="0" cy="0"/>
+        </a:xfrm>
+      </p:grpSpPr>
+      <p:sp>
+        <p:nvSpPr>
+          <p:cNvPr id="2" name="讲课提示"/>
+          <p:cNvSpPr txBox="1"/>
+          <p:nvPr/>
+        </p:nvSpPr>
+        <p:spPr>
+          <a:xfrm>
+            <a:off x="457200" y="457200"/>
+            <a:ext cx="6858000" cy="4800600"/>
+          </a:xfrm>
+          <a:prstGeom prst="rect">
+            <a:avLst/>
+          </a:prstGeom>
+        </p:spPr>
+        <p:txBody>
+          <a:bodyPr wrap="square"/>
+          <a:lstStyle/>
+          <a:p>
+            <a:r>
+              <a:rPr lang="zh-CN" dirty="0"/>
+              <a:t>第 52 节 · 为什么需要测试与三条命名规则</a:t>
+            </a:r>
+          </a:p>
+          <a:p>
+            <a:r>
+              <a:rPr lang="zh-CN" dirty="0"/>
+              <a:t>单元 10 · 测试代码 · W12</a:t>
+            </a:r>
+          </a:p>
+          <a:p>
+            <a:r>
+              <a:rPr lang="zh-CN" dirty="0"/>
+              <a:t/>
+            </a:r>
+          </a:p>
+          <a:p>
+            <a:r>
+              <a:rPr lang="zh-CN" dirty="0"/>
+              <a:t>学习目标：理解 Bug 分两种，自动化测试的价值在改代码之前</a:t>
+            </a:r>
+          </a:p>
+          <a:p>
+            <a:r>
+              <a:rPr lang="zh-CN" dirty="0"/>
+              <a:t/>
+            </a:r>
+          </a:p>
+          <a:p>
+            <a:r>
+              <a:rPr lang="zh-CN" dirty="0"/>
+              <a:t>课堂实操（40 分钟，不看答案）：</a:t>
+            </a:r>
+          </a:p>
+          <a:p>
+            <a:r>
+              <a:rPr lang="zh-CN" dirty="0"/>
+              <a:t>· 先故意写一个错函数，看没有测试时能撑多久</a:t>
+            </a:r>
+          </a:p>
+          <a:p>
+            <a:r>
+              <a:rPr lang="zh-CN" dirty="0"/>
+              <a:t>· 把测试函数改成不符合命名规则，看能不能被收集</a:t>
+            </a:r>
+          </a:p>
+          <a:p>
+            <a:r>
+              <a:rPr lang="zh-CN" dirty="0"/>
+              <a:t/>
+            </a:r>
+          </a:p>
+          <a:p>
+            <a:r>
+              <a:rPr lang="zh-CN" dirty="0"/>
+              <a:t>课后作业：</a:t>
+            </a:r>
+          </a:p>
+          <a:p>
+            <a:r>
+              <a:rPr lang="zh-CN" dirty="0"/>
+              <a:t>· 完成动手练习 10-1 ~ 10-2</a:t>
+            </a:r>
+          </a:p>
+          <a:p>
+            <a:r>
+              <a:rPr lang="zh-CN" dirty="0"/>
+              <a:t/>
+            </a:r>
+          </a:p>
+          <a:p>
+            <a:r>
+              <a:rPr lang="zh-CN" dirty="0"/>
+              <a:t>节奏：讲 20 分钟 → 学员自己敲 40 分钟（不看答案）→ 对讲评自查 20 分钟 → 写作业 10 分钟。</a:t>
+            </a:r>
+          </a:p>
+        </p:txBody>
+      </p:sp>
+    </p:spTree>
+  </p:cSld>
+  <p:clrMapOvr>
+    <a:masterClrMapping/>
+  </p:clrMapOvr>
+</p:notes>
+</file>
+
+<file path=ppt/notesSlides/notesSlide3.xml><?xml version="1.0" encoding="utf-8"?>
+<p:notes xmlns:a="http://schemas.openxmlformats.org/drawingml/2006/main" xmlns:p="http://schemas.openxmlformats.org/presentationml/2006/main" xmlns:r="http://schemas.openxmlformats.org/officeDocument/2006/relationships">
+  <p:cSld>
+    <p:spTree>
+      <p:nvGrpSpPr>
+        <p:cNvPr id="1" name=""/>
+        <p:cNvGrpSpPr/>
+        <p:nvPr/>
+      </p:nvGrpSpPr>
+      <p:grpSpPr>
+        <a:xfrm>
+          <a:off x="0" y="0"/>
+          <a:ext cx="0" cy="0"/>
+          <a:chOff x="0" y="0"/>
+          <a:chExt cx="0" cy="0"/>
+        </a:xfrm>
+      </p:grpSpPr>
+      <p:sp>
+        <p:nvSpPr>
+          <p:cNvPr id="2" name="讲课提示"/>
+          <p:cNvSpPr txBox="1"/>
+          <p:nvPr/>
+        </p:nvSpPr>
+        <p:spPr>
+          <a:xfrm>
+            <a:off x="457200" y="457200"/>
+            <a:ext cx="6858000" cy="4800600"/>
+          </a:xfrm>
+          <a:prstGeom prst="rect">
+            <a:avLst/>
+          </a:prstGeom>
+        </p:spPr>
+        <p:txBody>
+          <a:bodyPr wrap="square"/>
+          <a:lstStyle/>
+          <a:p>
+            <a:r>
+              <a:rPr lang="zh-CN" dirty="0"/>
+              <a:t>第 52 节 · 核心知识点：为什么需要测试与三条命名规则</a:t>
+            </a:r>
+          </a:p>
+          <a:p>
+            <a:r>
+              <a:rPr lang="zh-CN" dirty="0"/>
+              <a:t/>
+            </a:r>
+          </a:p>
+          <a:p>
+            <a:r>
+              <a:rPr lang="zh-CN" dirty="0"/>
+              <a:t>讲这一页时：先让学生说出上节课的结论，再逐块讲要点。</a:t>
+            </a:r>
+          </a:p>
+          <a:p>
+            <a:r>
+              <a:rPr lang="zh-CN" dirty="0"/>
+              <a:t>每讲完一块，问一句「这一步如果写错了，报错会长什么样？」——把错误提前讲。</a:t>
+            </a:r>
+          </a:p>
+          <a:p>
+            <a:r>
+              <a:rPr lang="zh-CN" dirty="0"/>
+              <a:t/>
+            </a:r>
+          </a:p>
+          <a:p>
+            <a:r>
+              <a:rPr lang="zh-CN" dirty="0"/>
+              <a:t>本节目标：理解 Bug 分两种，自动化测试的价值在改代码之前</a:t>
+            </a:r>
+          </a:p>
+          <a:p>
+            <a:r>
+              <a:rPr lang="zh-CN" dirty="0"/>
+              <a:t/>
+            </a:r>
+          </a:p>
+          <a:p>
+            <a:r>
+              <a:rPr lang="zh-CN" dirty="0"/>
+              <a:t>看不到懂的地方，回讲义对应小节读一遍，再回来对着这页复述一次——能讲出来才算真懂。</a:t>
+            </a:r>
+          </a:p>
+        </p:txBody>
+      </p:sp>
+    </p:spTree>
+  </p:cSld>
+  <p:clrMapOvr>
+    <a:masterClrMapping/>
+  </p:clrMapOvr>
+</p:notes>
+</file>
+
+<file path=ppt/notesSlides/notesSlide4.xml><?xml version="1.0" encoding="utf-8"?>
+<p:notes xmlns:a="http://schemas.openxmlformats.org/drawingml/2006/main" xmlns:p="http://schemas.openxmlformats.org/presentationml/2006/main" xmlns:r="http://schemas.openxmlformats.org/officeDocument/2006/relationships">
+  <p:cSld>
+    <p:spTree>
+      <p:nvGrpSpPr>
+        <p:cNvPr id="1" name=""/>
+        <p:cNvGrpSpPr/>
+        <p:nvPr/>
+      </p:nvGrpSpPr>
+      <p:grpSpPr>
+        <a:xfrm>
+          <a:off x="0" y="0"/>
+          <a:ext cx="0" cy="0"/>
+          <a:chOff x="0" y="0"/>
+          <a:chExt cx="0" cy="0"/>
+        </a:xfrm>
+      </p:grpSpPr>
+      <p:sp>
+        <p:nvSpPr>
+          <p:cNvPr id="2" name="讲课提示"/>
+          <p:cNvSpPr txBox="1"/>
+          <p:nvPr/>
+        </p:nvSpPr>
+        <p:spPr>
+          <a:xfrm>
+            <a:off x="457200" y="457200"/>
+            <a:ext cx="6858000" cy="4800600"/>
+          </a:xfrm>
+          <a:prstGeom prst="rect">
+            <a:avLst/>
+          </a:prstGeom>
+        </p:spPr>
+        <p:txBody>
+          <a:bodyPr wrap="square"/>
+          <a:lstStyle/>
+          <a:p>
+            <a:r>
+              <a:rPr lang="zh-CN" dirty="0"/>
+              <a:t>第 53 节 · assert 与测试用例设计</a:t>
+            </a:r>
+          </a:p>
+          <a:p>
+            <a:r>
+              <a:rPr lang="zh-CN" dirty="0"/>
+              <a:t>单元 10 · 测试代码 · W12</a:t>
+            </a:r>
+          </a:p>
+          <a:p>
+            <a:r>
+              <a:rPr lang="zh-CN" dirty="0"/>
+              <a:t/>
+            </a:r>
+          </a:p>
+          <a:p>
+            <a:r>
+              <a:rPr lang="zh-CN" dirty="0"/>
+              <a:t>学习目标：会用 assert 描述「应该是什么」，掌握正常 + 边界两种用例</a:t>
+            </a:r>
+          </a:p>
+          <a:p>
+            <a:r>
+              <a:rPr lang="zh-CN" dirty="0"/>
+              <a:t/>
+            </a:r>
+          </a:p>
+          <a:p>
+            <a:r>
+              <a:rPr lang="zh-CN" dirty="0"/>
+              <a:t>课堂实操（40 分钟，不看答案）：</a:t>
+            </a:r>
+          </a:p>
+          <a:p>
+            <a:r>
+              <a:rPr lang="zh-CN" dirty="0"/>
+              <a:t>· 给一个函数写 3 条测试：正常 / 边界 / 异常</a:t>
+            </a:r>
+          </a:p>
+          <a:p>
+            <a:r>
+              <a:rPr lang="zh-CN" dirty="0"/>
+              <a:t>· 故意让一条测试失败并读懂报告</a:t>
+            </a:r>
+          </a:p>
+          <a:p>
+            <a:r>
+              <a:rPr lang="zh-CN" dirty="0"/>
+              <a:t/>
+            </a:r>
+          </a:p>
+          <a:p>
+            <a:r>
+              <a:rPr lang="zh-CN" dirty="0"/>
+              <a:t>课后作业：</a:t>
+            </a:r>
+          </a:p>
+          <a:p>
+            <a:r>
+              <a:rPr lang="zh-CN" dirty="0"/>
+              <a:t>· 完成动手练习 10-3 ~ 10-5</a:t>
+            </a:r>
+          </a:p>
+          <a:p>
+            <a:r>
+              <a:rPr lang="zh-CN" dirty="0"/>
+              <a:t/>
+            </a:r>
+          </a:p>
+          <a:p>
+            <a:r>
+              <a:rPr lang="zh-CN" dirty="0"/>
+              <a:t>节奏：讲 20 分钟 → 学员自己敲 40 分钟（不看答案）→ 对讲评自查 20 分钟 → 写作业 10 分钟。</a:t>
+            </a:r>
+          </a:p>
+        </p:txBody>
+      </p:sp>
+    </p:spTree>
+  </p:cSld>
+  <p:clrMapOvr>
+    <a:masterClrMapping/>
+  </p:clrMapOvr>
+</p:notes>
+</file>
+
+<file path=ppt/notesSlides/notesSlide5.xml><?xml version="1.0" encoding="utf-8"?>
+<p:notes xmlns:a="http://schemas.openxmlformats.org/drawingml/2006/main" xmlns:p="http://schemas.openxmlformats.org/presentationml/2006/main" xmlns:r="http://schemas.openxmlformats.org/officeDocument/2006/relationships">
+  <p:cSld>
+    <p:spTree>
+      <p:nvGrpSpPr>
+        <p:cNvPr id="1" name=""/>
+        <p:cNvGrpSpPr/>
+        <p:nvPr/>
+      </p:nvGrpSpPr>
+      <p:grpSpPr>
+        <a:xfrm>
+          <a:off x="0" y="0"/>
+          <a:ext cx="0" cy="0"/>
+          <a:chOff x="0" y="0"/>
+          <a:chExt cx="0" cy="0"/>
+        </a:xfrm>
+      </p:grpSpPr>
+      <p:sp>
+        <p:nvSpPr>
+          <p:cNvPr id="2" name="讲课提示"/>
+          <p:cNvSpPr txBox="1"/>
+          <p:nvPr/>
+        </p:nvSpPr>
+        <p:spPr>
+          <a:xfrm>
+            <a:off x="457200" y="457200"/>
+            <a:ext cx="6858000" cy="4800600"/>
+          </a:xfrm>
+          <a:prstGeom prst="rect">
+            <a:avLst/>
+          </a:prstGeom>
+        </p:spPr>
+        <p:txBody>
+          <a:bodyPr wrap="square"/>
+          <a:lstStyle/>
+          <a:p>
+            <a:r>
+              <a:rPr lang="zh-CN" dirty="0"/>
+              <a:t>第 53 节 · 核心知识点：assert 与测试用例设计</a:t>
+            </a:r>
+          </a:p>
+          <a:p>
+            <a:r>
+              <a:rPr lang="zh-CN" dirty="0"/>
+              <a:t/>
+            </a:r>
+          </a:p>
+          <a:p>
+            <a:r>
+              <a:rPr lang="zh-CN" dirty="0"/>
+              <a:t>讲这一页时：先让学生说出上节课的结论，再逐块讲要点。</a:t>
+            </a:r>
+          </a:p>
+          <a:p>
+            <a:r>
+              <a:rPr lang="zh-CN" dirty="0"/>
+              <a:t>每讲完一块，问一句「这一步如果写错了，报错会长什么样？」——把错误提前讲。</a:t>
+            </a:r>
+          </a:p>
+          <a:p>
+            <a:r>
+              <a:rPr lang="zh-CN" dirty="0"/>
+              <a:t/>
+            </a:r>
+          </a:p>
+          <a:p>
+            <a:r>
+              <a:rPr lang="zh-CN" dirty="0"/>
+              <a:t>本节目标：会用 assert 描述「应该是什么」，掌握正常 + 边界两种用例</a:t>
+            </a:r>
+          </a:p>
+          <a:p>
+            <a:r>
+              <a:rPr lang="zh-CN" dirty="0"/>
+              <a:t/>
+            </a:r>
+          </a:p>
+          <a:p>
+            <a:r>
+              <a:rPr lang="zh-CN" dirty="0"/>
+              <a:t>看不到懂的地方，回讲义对应小节读一遍，再回来对着这页复述一次——能讲出来才算真懂。</a:t>
+            </a:r>
+          </a:p>
+        </p:txBody>
+      </p:sp>
+    </p:spTree>
+  </p:cSld>
+  <p:clrMapOvr>
+    <a:masterClrMapping/>
+  </p:clrMapOvr>
+</p:notes>
+</file>
+
+<file path=ppt/notesSlides/notesSlide6.xml><?xml version="1.0" encoding="utf-8"?>
+<p:notes xmlns:a="http://schemas.openxmlformats.org/drawingml/2006/main" xmlns:p="http://schemas.openxmlformats.org/presentationml/2006/main" xmlns:r="http://schemas.openxmlformats.org/officeDocument/2006/relationships">
+  <p:cSld>
+    <p:spTree>
+      <p:nvGrpSpPr>
+        <p:cNvPr id="1" name=""/>
+        <p:cNvGrpSpPr/>
+        <p:nvPr/>
+      </p:nvGrpSpPr>
+      <p:grpSpPr>
+        <a:xfrm>
+          <a:off x="0" y="0"/>
+          <a:ext cx="0" cy="0"/>
+          <a:chOff x="0" y="0"/>
+          <a:chExt cx="0" cy="0"/>
+        </a:xfrm>
+      </p:grpSpPr>
+      <p:sp>
+        <p:nvSpPr>
+          <p:cNvPr id="2" name="讲课提示"/>
+          <p:cNvSpPr txBox="1"/>
+          <p:nvPr/>
+        </p:nvSpPr>
+        <p:spPr>
+          <a:xfrm>
+            <a:off x="457200" y="457200"/>
+            <a:ext cx="6858000" cy="4800600"/>
+          </a:xfrm>
+          <a:prstGeom prst="rect">
+            <a:avLst/>
+          </a:prstGeom>
+        </p:spPr>
+        <p:txBody>
+          <a:bodyPr wrap="square"/>
+          <a:lstStyle/>
+          <a:p>
+            <a:r>
+              <a:rPr lang="zh-CN" dirty="0"/>
+              <a:t>第 54 节 · parametrize、测试类与运行命令</a:t>
+            </a:r>
+          </a:p>
+          <a:p>
+            <a:r>
+              <a:rPr lang="zh-CN" dirty="0"/>
+              <a:t>单元 10 · 测试代码 · W12</a:t>
+            </a:r>
+          </a:p>
+          <a:p>
+            <a:r>
+              <a:rPr lang="zh-CN" dirty="0"/>
+              <a:t/>
+            </a:r>
+          </a:p>
+          <a:p>
+            <a:r>
+              <a:rPr lang="zh-CN" dirty="0"/>
+              <a:t>学习目标：会用 parametrize 一次测多组数据，掌握测试类与常用命令</a:t>
+            </a:r>
+          </a:p>
+          <a:p>
+            <a:r>
+              <a:rPr lang="zh-CN" dirty="0"/>
+              <a:t/>
+            </a:r>
+          </a:p>
+          <a:p>
+            <a:r>
+              <a:rPr lang="zh-CN" dirty="0"/>
+              <a:t>课堂实操（40 分钟，不看答案）：</a:t>
+            </a:r>
+          </a:p>
+          <a:p>
+            <a:r>
+              <a:rPr lang="zh-CN" dirty="0"/>
+              <a:t>· 把 5 条相似测试合并成一条 parametrize</a:t>
+            </a:r>
+          </a:p>
+          <a:p>
+            <a:r>
+              <a:rPr lang="zh-CN" dirty="0"/>
+              <a:t>· 跑一次完整 pytest 并读懂输出</a:t>
+            </a:r>
+          </a:p>
+          <a:p>
+            <a:r>
+              <a:rPr lang="zh-CN" dirty="0"/>
+              <a:t/>
+            </a:r>
+          </a:p>
+          <a:p>
+            <a:r>
+              <a:rPr lang="zh-CN" dirty="0"/>
+              <a:t>课后作业：</a:t>
+            </a:r>
+          </a:p>
+          <a:p>
+            <a:r>
+              <a:rPr lang="zh-CN" dirty="0"/>
+              <a:t>· 完成动手练习 10-6 ~ 10-8</a:t>
+            </a:r>
+          </a:p>
+          <a:p>
+            <a:r>
+              <a:rPr lang="zh-CN" dirty="0"/>
+              <a:t/>
+            </a:r>
+          </a:p>
+          <a:p>
+            <a:r>
+              <a:rPr lang="zh-CN" dirty="0"/>
+              <a:t>节奏：讲 20 分钟 → 学员自己敲 40 分钟（不看答案）→ 对讲评自查 20 分钟 → 写作业 10 分钟。</a:t>
+            </a:r>
+          </a:p>
+        </p:txBody>
+      </p:sp>
+    </p:spTree>
+  </p:cSld>
+  <p:clrMapOvr>
+    <a:masterClrMapping/>
+  </p:clrMapOvr>
+</p:notes>
+</file>
+
+<file path=ppt/notesSlides/notesSlide7.xml><?xml version="1.0" encoding="utf-8"?>
+<p:notes xmlns:a="http://schemas.openxmlformats.org/drawingml/2006/main" xmlns:p="http://schemas.openxmlformats.org/presentationml/2006/main" xmlns:r="http://schemas.openxmlformats.org/officeDocument/2006/relationships">
+  <p:cSld>
+    <p:spTree>
+      <p:nvGrpSpPr>
+        <p:cNvPr id="1" name=""/>
+        <p:cNvGrpSpPr/>
+        <p:nvPr/>
+      </p:nvGrpSpPr>
+      <p:grpSpPr>
+        <a:xfrm>
+          <a:off x="0" y="0"/>
+          <a:ext cx="0" cy="0"/>
+          <a:chOff x="0" y="0"/>
+          <a:chExt cx="0" cy="0"/>
+        </a:xfrm>
+      </p:grpSpPr>
+      <p:sp>
+        <p:nvSpPr>
+          <p:cNvPr id="2" name="讲课提示"/>
+          <p:cNvSpPr txBox="1"/>
+          <p:nvPr/>
+        </p:nvSpPr>
+        <p:spPr>
+          <a:xfrm>
+            <a:off x="457200" y="457200"/>
+            <a:ext cx="6858000" cy="4800600"/>
+          </a:xfrm>
+          <a:prstGeom prst="rect">
+            <a:avLst/>
+          </a:prstGeom>
+        </p:spPr>
+        <p:txBody>
+          <a:bodyPr wrap="square"/>
+          <a:lstStyle/>
+          <a:p>
+            <a:r>
+              <a:rPr lang="zh-CN" dirty="0"/>
+              <a:t>第 54 节 · 核心知识点：parametrize、测试类与运行命令</a:t>
+            </a:r>
+          </a:p>
+          <a:p>
+            <a:r>
+              <a:rPr lang="zh-CN" dirty="0"/>
+              <a:t/>
+            </a:r>
+          </a:p>
+          <a:p>
+            <a:r>
+              <a:rPr lang="zh-CN" dirty="0"/>
+              <a:t>讲这一页时：先让学生说出上节课的结论，再逐块讲要点。</a:t>
+            </a:r>
+          </a:p>
+          <a:p>
+            <a:r>
+              <a:rPr lang="zh-CN" dirty="0"/>
+              <a:t>每讲完一块，问一句「这一步如果写错了，报错会长什么样？」——把错误提前讲。</a:t>
+            </a:r>
+          </a:p>
+          <a:p>
+            <a:r>
+              <a:rPr lang="zh-CN" dirty="0"/>
+              <a:t/>
+            </a:r>
+          </a:p>
+          <a:p>
+            <a:r>
+              <a:rPr lang="zh-CN" dirty="0"/>
+              <a:t>本节目标：会用 parametrize 一次测多组数据，掌握测试类与常用命令</a:t>
+            </a:r>
+          </a:p>
+          <a:p>
+            <a:r>
+              <a:rPr lang="zh-CN" dirty="0"/>
+              <a:t/>
+            </a:r>
+          </a:p>
+          <a:p>
+            <a:r>
+              <a:rPr lang="zh-CN" dirty="0"/>
+              <a:t>看不到懂的地方，回讲义对应小节读一遍，再回来对着这页复述一次——能讲出来才算真懂。</a:t>
+            </a:r>
+          </a:p>
+        </p:txBody>
+      </p:sp>
+    </p:spTree>
+  </p:cSld>
+  <p:clrMapOvr>
+    <a:masterClrMapping/>
+  </p:clrMapOvr>
+</p:notes>
+</file>
+
+<file path=ppt/notesSlides/notesSlide8.xml><?xml version="1.0" encoding="utf-8"?>
+<p:notes xmlns:a="http://schemas.openxmlformats.org/drawingml/2006/main" xmlns:p="http://schemas.openxmlformats.org/presentationml/2006/main" xmlns:r="http://schemas.openxmlformats.org/officeDocument/2006/relationships">
+  <p:cSld>
+    <p:spTree>
+      <p:nvGrpSpPr>
+        <p:cNvPr id="1" name=""/>
+        <p:cNvGrpSpPr/>
+        <p:nvPr/>
+      </p:nvGrpSpPr>
+      <p:grpSpPr>
+        <a:xfrm>
+          <a:off x="0" y="0"/>
+          <a:ext cx="0" cy="0"/>
+          <a:chOff x="0" y="0"/>
+          <a:chExt cx="0" cy="0"/>
+        </a:xfrm>
+      </p:grpSpPr>
+      <p:sp>
+        <p:nvSpPr>
+          <p:cNvPr id="2" name="讲课提示"/>
+          <p:cNvSpPr txBox="1"/>
+          <p:nvPr/>
+        </p:nvSpPr>
+        <p:spPr>
+          <a:xfrm>
+            <a:off x="457200" y="457200"/>
+            <a:ext cx="6858000" cy="4800600"/>
+          </a:xfrm>
+          <a:prstGeom prst="rect">
+            <a:avLst/>
+          </a:prstGeom>
+        </p:spPr>
+        <p:txBody>
+          <a:bodyPr wrap="square"/>
+          <a:lstStyle/>
+          <a:p>
+            <a:r>
+              <a:rPr lang="zh-CN" dirty="0"/>
+              <a:t>第 55 节 · 测试夹具与示例串讲</a:t>
+            </a:r>
+          </a:p>
+          <a:p>
+            <a:r>
+              <a:rPr lang="zh-CN" dirty="0"/>
+              <a:t>单元 10 · 测试代码 · W12</a:t>
+            </a:r>
+          </a:p>
+          <a:p>
+            <a:r>
+              <a:rPr lang="zh-CN" dirty="0"/>
+              <a:t/>
+            </a:r>
+          </a:p>
+          <a:p>
+            <a:r>
+              <a:rPr lang="zh-CN" dirty="0"/>
+              <a:t>学习目标：理解夹具解决什么问题，能读懂 pytest 的输出报告</a:t>
+            </a:r>
+          </a:p>
+          <a:p>
+            <a:r>
+              <a:rPr lang="zh-CN" dirty="0"/>
+              <a:t/>
+            </a:r>
+          </a:p>
+          <a:p>
+            <a:r>
+              <a:rPr lang="zh-CN" dirty="0"/>
+              <a:t>课堂实操（40 分钟，不看答案）：</a:t>
+            </a:r>
+          </a:p>
+          <a:p>
+            <a:r>
+              <a:rPr lang="zh-CN" dirty="0"/>
+              <a:t>· 对照示例讲清测试夹具的用途</a:t>
+            </a:r>
+          </a:p>
+          <a:p>
+            <a:r>
+              <a:rPr lang="zh-CN" dirty="0"/>
+              <a:t>· 故意让一个测试类失败并读懂报告</a:t>
+            </a:r>
+          </a:p>
+          <a:p>
+            <a:r>
+              <a:rPr lang="zh-CN" dirty="0"/>
+              <a:t/>
+            </a:r>
+          </a:p>
+          <a:p>
+            <a:r>
+              <a:rPr lang="zh-CN" dirty="0"/>
+              <a:t>课后作业：</a:t>
+            </a:r>
+          </a:p>
+          <a:p>
+            <a:r>
+              <a:rPr lang="zh-CN" dirty="0"/>
+              <a:t>· 给单元 7/8/9 写过的代码补测试（共 8 条以上）</a:t>
+            </a:r>
+          </a:p>
+          <a:p>
+            <a:r>
+              <a:rPr lang="zh-CN" dirty="0"/>
+              <a:t/>
+            </a:r>
+          </a:p>
+          <a:p>
+            <a:r>
+              <a:rPr lang="zh-CN" dirty="0"/>
+              <a:t>节奏：讲 20 分钟 → 学员自己敲 40 分钟（不看答案）→ 对讲评自查 20 分钟 → 写作业 10 分钟。</a:t>
+            </a:r>
+          </a:p>
+        </p:txBody>
+      </p:sp>
+    </p:spTree>
+  </p:cSld>
+  <p:clrMapOvr>
+    <a:masterClrMapping/>
+  </p:clrMapOvr>
+</p:notes>
+</file>
+
+<file path=ppt/notesSlides/notesSlide9.xml><?xml version="1.0" encoding="utf-8"?>
+<p:notes xmlns:a="http://schemas.openxmlformats.org/drawingml/2006/main" xmlns:p="http://schemas.openxmlformats.org/presentationml/2006/main" xmlns:r="http://schemas.openxmlformats.org/officeDocument/2006/relationships">
+  <p:cSld>
+    <p:spTree>
+      <p:nvGrpSpPr>
+        <p:cNvPr id="1" name=""/>
+        <p:cNvGrpSpPr/>
+        <p:nvPr/>
+      </p:nvGrpSpPr>
+      <p:grpSpPr>
+        <a:xfrm>
+          <a:off x="0" y="0"/>
+          <a:ext cx="0" cy="0"/>
+          <a:chOff x="0" y="0"/>
+          <a:chExt cx="0" cy="0"/>
+        </a:xfrm>
+      </p:grpSpPr>
+      <p:sp>
+        <p:nvSpPr>
+          <p:cNvPr id="2" name="讲课提示"/>
+          <p:cNvSpPr txBox="1"/>
+          <p:nvPr/>
+        </p:nvSpPr>
+        <p:spPr>
+          <a:xfrm>
+            <a:off x="457200" y="457200"/>
+            <a:ext cx="6858000" cy="4800600"/>
+          </a:xfrm>
+          <a:prstGeom prst="rect">
+            <a:avLst/>
+          </a:prstGeom>
+        </p:spPr>
+        <p:txBody>
+          <a:bodyPr wrap="square"/>
+          <a:lstStyle/>
+          <a:p>
+            <a:r>
+              <a:rPr lang="zh-CN" dirty="0"/>
+              <a:t>第 55 节 · 核心知识点：测试夹具与示例串讲</a:t>
+            </a:r>
+          </a:p>
+          <a:p>
+            <a:r>
+              <a:rPr lang="zh-CN" dirty="0"/>
+              <a:t/>
+            </a:r>
+          </a:p>
+          <a:p>
+            <a:r>
+              <a:rPr lang="zh-CN" dirty="0"/>
+              <a:t>讲这一页时：先让学生说出上节课的结论，再逐块讲要点。</a:t>
+            </a:r>
+          </a:p>
+          <a:p>
+            <a:r>
+              <a:rPr lang="zh-CN" dirty="0"/>
+              <a:t>每讲完一块，问一句「这一步如果写错了，报错会长什么样？」——把错误提前讲。</a:t>
+            </a:r>
+          </a:p>
+          <a:p>
+            <a:r>
+              <a:rPr lang="zh-CN" dirty="0"/>
+              <a:t/>
+            </a:r>
+          </a:p>
+          <a:p>
+            <a:r>
+              <a:rPr lang="zh-CN" dirty="0"/>
+              <a:t>本节目标：理解夹具解决什么问题，能读懂 pytest 的输出报告</a:t>
+            </a:r>
+          </a:p>
+          <a:p>
+            <a:r>
+              <a:rPr lang="zh-CN" dirty="0"/>
+              <a:t/>
+            </a:r>
+          </a:p>
+          <a:p>
+            <a:r>
+              <a:rPr lang="zh-CN" dirty="0"/>
+              <a:t>看不到懂的地方，回讲义对应小节读一遍，再回来对着这页复述一次——能讲出来才算真懂。</a:t>
+            </a:r>
+          </a:p>
+        </p:txBody>
+      </p:sp>
+    </p:spTree>
+  </p:cSld>
+  <p:clrMapOvr>
+    <a:masterClrMapping/>
+  </p:clrMapOvr>
+</p:notes>
 </file>
 
 <file path=ppt/slideLayouts/slideLayout1.xml><?xml version="1.0" encoding="utf-8"?>
